--- a/20261001_サンクスLINEのご提案.pptx
+++ b/20261001_サンクスLINEのご提案.pptx
@@ -3907,526 +3907,14 @@
       </p:cxnSp>
       <p:sp>
         <p:nvSpPr>
-          <p:cNvPr id="5" name="Rounded Rectangle 4"/>
-          <p:cNvSpPr/>
-          <p:nvPr/>
-        </p:nvSpPr>
-        <p:spPr>
-          <a:xfrm>
-            <a:off x="525600" y="2052000"/>
-            <a:ext cx="1584000" cy="1368000"/>
-          </a:xfrm>
-          <a:prstGeom prst="roundRect">
-            <a:avLst>
-              <a:gd name="adj" fmla="val 10000"/>
-            </a:avLst>
-          </a:prstGeom>
-          <a:solidFill>
-            <a:srgbClr val="F4F7FF"/>
-          </a:solidFill>
-          <a:ln w="12700">
-            <a:solidFill>
-              <a:srgbClr val="D9D9D9"/>
-            </a:solidFill>
-          </a:ln>
-          <a:effectLst/>
-        </p:spPr>
-        <p:style>
-          <a:lnRef idx="1">
-            <a:schemeClr val="accent1"/>
-          </a:lnRef>
-          <a:fillRef idx="3">
-            <a:schemeClr val="accent1"/>
-          </a:fillRef>
-          <a:effectRef idx="2">
-            <a:schemeClr val="accent1"/>
-          </a:effectRef>
-          <a:fontRef idx="minor">
-            <a:schemeClr val="lt1"/>
-          </a:fontRef>
-        </p:style>
-        <p:txBody>
-          <a:bodyPr wrap="square" lIns="54000" tIns="18000" rIns="54000" bIns="18000" rtlCol="0" anchor="ctr"/>
-          <a:lstStyle/>
-          <a:p>
-            <a:pPr algn="ctr">
-              <a:lnSpc>
-                <a:spcPct val="120000"/>
-              </a:lnSpc>
-            </a:pPr>
-            <a:r>
-              <a:rPr sz="1700" b="1">
-                <a:solidFill>
-                  <a:srgbClr val="1F285A"/>
-                </a:solidFill>
-                <a:latin typeface="メイリオ"/>
-                <a:ea typeface="メイリオ"/>
-                <a:cs typeface="メイリオ"/>
-              </a:rPr>
-              <a:t>フォーム入力</a:t>
-            </a:r>
-          </a:p>
-        </p:txBody>
-      </p:sp>
-      <p:sp>
-        <p:nvSpPr>
-          <p:cNvPr id="6" name="Right Arrow 5"/>
-          <p:cNvSpPr/>
-          <p:nvPr/>
-        </p:nvSpPr>
-        <p:spPr>
-          <a:xfrm>
-            <a:off x="2181600" y="2556000"/>
-            <a:ext cx="288000" cy="360000"/>
-          </a:xfrm>
-          <a:prstGeom prst="rightArrow">
-            <a:avLst/>
-          </a:prstGeom>
-          <a:solidFill>
-            <a:srgbClr val="1F285A"/>
-          </a:solidFill>
-          <a:ln>
-            <a:noFill/>
-          </a:ln>
-          <a:effectLst/>
-        </p:spPr>
-        <p:style>
-          <a:lnRef idx="1">
-            <a:schemeClr val="accent1"/>
-          </a:lnRef>
-          <a:fillRef idx="3">
-            <a:schemeClr val="accent1"/>
-          </a:fillRef>
-          <a:effectRef idx="2">
-            <a:schemeClr val="accent1"/>
-          </a:effectRef>
-          <a:fontRef idx="minor">
-            <a:schemeClr val="lt1"/>
-          </a:fontRef>
-        </p:style>
-        <p:txBody>
-          <a:bodyPr rtlCol="0" anchor="ctr"/>
-          <a:lstStyle/>
-          <a:p>
-            <a:pPr algn="ctr"/>
-            <a:endParaRPr>
-              <a:latin typeface="メイリオ"/>
-              <a:ea typeface="メイリオ"/>
-              <a:cs typeface="メイリオ"/>
-            </a:endParaRPr>
-          </a:p>
-        </p:txBody>
-      </p:sp>
-      <p:sp>
-        <p:nvSpPr>
-          <p:cNvPr id="7" name="Rounded Rectangle 6"/>
-          <p:cNvSpPr/>
-          <p:nvPr/>
-        </p:nvSpPr>
-        <p:spPr>
-          <a:xfrm>
-            <a:off x="2541600" y="2052000"/>
-            <a:ext cx="1872000" cy="1368000"/>
-          </a:xfrm>
-          <a:prstGeom prst="roundRect">
-            <a:avLst>
-              <a:gd name="adj" fmla="val 10000"/>
-            </a:avLst>
-          </a:prstGeom>
-          <a:solidFill>
-            <a:srgbClr val="F4F7FF"/>
-          </a:solidFill>
-          <a:ln w="12700">
-            <a:solidFill>
-              <a:srgbClr val="D9D9D9"/>
-            </a:solidFill>
-          </a:ln>
-          <a:effectLst/>
-        </p:spPr>
-        <p:style>
-          <a:lnRef idx="1">
-            <a:schemeClr val="accent1"/>
-          </a:lnRef>
-          <a:fillRef idx="3">
-            <a:schemeClr val="accent1"/>
-          </a:fillRef>
-          <a:effectRef idx="2">
-            <a:schemeClr val="accent1"/>
-          </a:effectRef>
-          <a:fontRef idx="minor">
-            <a:schemeClr val="lt1"/>
-          </a:fontRef>
-        </p:style>
-        <p:txBody>
-          <a:bodyPr wrap="square" lIns="54000" tIns="18000" rIns="54000" bIns="18000" rtlCol="0" anchor="ctr"/>
-          <a:lstStyle/>
-          <a:p>
-            <a:pPr algn="ctr">
-              <a:lnSpc>
-                <a:spcPct val="120000"/>
-              </a:lnSpc>
-            </a:pPr>
-            <a:r>
-              <a:rPr sz="1700" b="1">
-                <a:solidFill>
-                  <a:srgbClr val="1F285A"/>
-                </a:solidFill>
-                <a:latin typeface="メイリオ"/>
-                <a:ea typeface="メイリオ"/>
-                <a:cs typeface="メイリオ"/>
-              </a:rPr>
-              <a:t>申込み完了</a:t>
-            </a:r>
-          </a:p>
-          <a:p>
-            <a:pPr algn="ctr">
-              <a:lnSpc>
-                <a:spcPct val="120000"/>
-              </a:lnSpc>
-            </a:pPr>
-            <a:r>
-              <a:rPr sz="1300" b="0">
-                <a:solidFill>
-                  <a:srgbClr val="1F285A"/>
-                </a:solidFill>
-                <a:latin typeface="メイリオ"/>
-                <a:ea typeface="メイリオ"/>
-                <a:cs typeface="メイリオ"/>
-              </a:rPr>
-              <a:t>購入・予約・資料請求</a:t>
-            </a:r>
-          </a:p>
-        </p:txBody>
-      </p:sp>
-      <p:sp>
-        <p:nvSpPr>
-          <p:cNvPr id="8" name="Right Arrow 7"/>
-          <p:cNvSpPr/>
-          <p:nvPr/>
-        </p:nvSpPr>
-        <p:spPr>
-          <a:xfrm>
-            <a:off x="4485600" y="2556000"/>
-            <a:ext cx="288000" cy="360000"/>
-          </a:xfrm>
-          <a:prstGeom prst="rightArrow">
-            <a:avLst/>
-          </a:prstGeom>
-          <a:solidFill>
-            <a:srgbClr val="06C755"/>
-          </a:solidFill>
-          <a:ln>
-            <a:noFill/>
-          </a:ln>
-          <a:effectLst/>
-        </p:spPr>
-        <p:style>
-          <a:lnRef idx="1">
-            <a:schemeClr val="accent1"/>
-          </a:lnRef>
-          <a:fillRef idx="3">
-            <a:schemeClr val="accent1"/>
-          </a:fillRef>
-          <a:effectRef idx="2">
-            <a:schemeClr val="accent1"/>
-          </a:effectRef>
-          <a:fontRef idx="minor">
-            <a:schemeClr val="lt1"/>
-          </a:fontRef>
-        </p:style>
-        <p:txBody>
-          <a:bodyPr rtlCol="0" anchor="ctr"/>
-          <a:lstStyle/>
-          <a:p>
-            <a:pPr algn="ctr"/>
-            <a:endParaRPr>
-              <a:latin typeface="メイリオ"/>
-              <a:ea typeface="メイリオ"/>
-              <a:cs typeface="メイリオ"/>
-            </a:endParaRPr>
-          </a:p>
-        </p:txBody>
-      </p:sp>
-      <p:sp>
-        <p:nvSpPr>
-          <p:cNvPr id="9" name="Rounded Rectangle 8"/>
-          <p:cNvSpPr/>
-          <p:nvPr/>
-        </p:nvSpPr>
-        <p:spPr>
-          <a:xfrm>
-            <a:off x="4845600" y="2052000"/>
-            <a:ext cx="1440000" cy="1368000"/>
-          </a:xfrm>
-          <a:prstGeom prst="roundRect">
-            <a:avLst>
-              <a:gd name="adj" fmla="val 10000"/>
-            </a:avLst>
-          </a:prstGeom>
-          <a:solidFill>
-            <a:srgbClr val="06C755"/>
-          </a:solidFill>
-          <a:ln>
-            <a:noFill/>
-          </a:ln>
-          <a:effectLst/>
-        </p:spPr>
-        <p:style>
-          <a:lnRef idx="1">
-            <a:schemeClr val="accent1"/>
-          </a:lnRef>
-          <a:fillRef idx="3">
-            <a:schemeClr val="accent1"/>
-          </a:fillRef>
-          <a:effectRef idx="2">
-            <a:schemeClr val="accent1"/>
-          </a:effectRef>
-          <a:fontRef idx="minor">
-            <a:schemeClr val="lt1"/>
-          </a:fontRef>
-        </p:style>
-        <p:txBody>
-          <a:bodyPr wrap="square" lIns="54000" tIns="18000" rIns="54000" bIns="18000" rtlCol="0" anchor="ctr"/>
-          <a:lstStyle/>
-          <a:p>
-            <a:pPr algn="ctr">
-              <a:lnSpc>
-                <a:spcPct val="120000"/>
-              </a:lnSpc>
-            </a:pPr>
-            <a:r>
-              <a:rPr sz="1600" b="0" dirty="0" err="1">
-                <a:solidFill>
-                  <a:srgbClr val="FFFFFF"/>
-                </a:solidFill>
-                <a:latin typeface="メイリオ"/>
-                <a:ea typeface="メイリオ"/>
-                <a:cs typeface="メイリオ"/>
-              </a:rPr>
-              <a:t>ツールで</a:t>
-            </a:r>
-            <a:endParaRPr sz="1200" b="0" dirty="0">
-              <a:solidFill>
-                <a:srgbClr val="FFFFFF"/>
-              </a:solidFill>
-              <a:latin typeface="メイリオ"/>
-              <a:ea typeface="メイリオ"/>
-              <a:cs typeface="メイリオ"/>
-            </a:endParaRPr>
-          </a:p>
-          <a:p>
-            <a:pPr algn="ctr">
-              <a:lnSpc>
-                <a:spcPct val="120000"/>
-              </a:lnSpc>
-            </a:pPr>
-            <a:r>
-              <a:rPr sz="1600" b="0" dirty="0" err="1">
-                <a:solidFill>
-                  <a:srgbClr val="FFFFFF"/>
-                </a:solidFill>
-                <a:latin typeface="メイリオ"/>
-                <a:ea typeface="メイリオ"/>
-                <a:cs typeface="メイリオ"/>
-              </a:rPr>
-              <a:t>LINEへ</a:t>
-            </a:r>
-            <a:endParaRPr sz="1200" b="0" dirty="0">
-              <a:solidFill>
-                <a:srgbClr val="FFFFFF"/>
-              </a:solidFill>
-              <a:latin typeface="メイリオ"/>
-              <a:ea typeface="メイリオ"/>
-              <a:cs typeface="メイリオ"/>
-            </a:endParaRPr>
-          </a:p>
-        </p:txBody>
-      </p:sp>
-      <p:sp>
-        <p:nvSpPr>
-          <p:cNvPr id="10" name="Right Arrow 9"/>
-          <p:cNvSpPr/>
-          <p:nvPr/>
-        </p:nvSpPr>
-        <p:spPr>
-          <a:xfrm>
-            <a:off x="6357600" y="2556000"/>
-            <a:ext cx="288000" cy="360000"/>
-          </a:xfrm>
-          <a:prstGeom prst="rightArrow">
-            <a:avLst/>
-          </a:prstGeom>
-          <a:solidFill>
-            <a:srgbClr val="06C755"/>
-          </a:solidFill>
-          <a:ln>
-            <a:noFill/>
-          </a:ln>
-          <a:effectLst/>
-        </p:spPr>
-        <p:style>
-          <a:lnRef idx="1">
-            <a:schemeClr val="accent1"/>
-          </a:lnRef>
-          <a:fillRef idx="3">
-            <a:schemeClr val="accent1"/>
-          </a:fillRef>
-          <a:effectRef idx="2">
-            <a:schemeClr val="accent1"/>
-          </a:effectRef>
-          <a:fontRef idx="minor">
-            <a:schemeClr val="lt1"/>
-          </a:fontRef>
-        </p:style>
-        <p:txBody>
-          <a:bodyPr rtlCol="0" anchor="ctr"/>
-          <a:lstStyle/>
-          <a:p>
-            <a:pPr algn="ctr"/>
-            <a:endParaRPr>
-              <a:latin typeface="メイリオ"/>
-              <a:ea typeface="メイリオ"/>
-              <a:cs typeface="メイリオ"/>
-            </a:endParaRPr>
-          </a:p>
-        </p:txBody>
-      </p:sp>
-      <p:sp>
-        <p:nvSpPr>
-          <p:cNvPr id="11" name="Rounded Rectangle 10"/>
-          <p:cNvSpPr/>
-          <p:nvPr/>
-        </p:nvSpPr>
-        <p:spPr>
-          <a:xfrm>
-            <a:off x="6717600" y="2052000"/>
-            <a:ext cx="2663999" cy="647999"/>
-          </a:xfrm>
-          <a:prstGeom prst="roundRect">
-            <a:avLst>
-              <a:gd name="adj" fmla="val 10000"/>
-            </a:avLst>
-          </a:prstGeom>
-          <a:solidFill>
-            <a:srgbClr val="E8F8EE"/>
-          </a:solidFill>
-          <a:ln w="12700">
-            <a:solidFill>
-              <a:srgbClr val="06C755"/>
-            </a:solidFill>
-          </a:ln>
-          <a:effectLst/>
-        </p:spPr>
-        <p:style>
-          <a:lnRef idx="1">
-            <a:schemeClr val="accent1"/>
-          </a:lnRef>
-          <a:fillRef idx="3">
-            <a:schemeClr val="accent1"/>
-          </a:fillRef>
-          <a:effectRef idx="2">
-            <a:schemeClr val="accent1"/>
-          </a:effectRef>
-          <a:fontRef idx="minor">
-            <a:schemeClr val="lt1"/>
-          </a:fontRef>
-        </p:style>
-        <p:txBody>
-          <a:bodyPr wrap="square" lIns="54000" tIns="18000" rIns="54000" bIns="18000" rtlCol="0" anchor="ctr"/>
-          <a:lstStyle/>
-          <a:p>
-            <a:pPr algn="ctr">
-              <a:lnSpc>
-                <a:spcPct val="120000"/>
-              </a:lnSpc>
-            </a:pPr>
-            <a:r>
-              <a:rPr sz="1300" b="1">
-                <a:solidFill>
-                  <a:srgbClr val="0B7A3B"/>
-                </a:solidFill>
-                <a:latin typeface="メイリオ"/>
-                <a:ea typeface="メイリオ"/>
-                <a:cs typeface="メイリオ"/>
-              </a:rPr>
-              <a:t>はじめての方 → 友だち追加へ</a:t>
-            </a:r>
-          </a:p>
-        </p:txBody>
-      </p:sp>
-      <p:sp>
-        <p:nvSpPr>
-          <p:cNvPr id="12" name="Rounded Rectangle 11"/>
-          <p:cNvSpPr/>
-          <p:nvPr/>
-        </p:nvSpPr>
-        <p:spPr>
-          <a:xfrm>
-            <a:off x="6717600" y="2772000"/>
-            <a:ext cx="2663999" cy="647999"/>
-          </a:xfrm>
-          <a:prstGeom prst="roundRect">
-            <a:avLst>
-              <a:gd name="adj" fmla="val 10000"/>
-            </a:avLst>
-          </a:prstGeom>
-          <a:solidFill>
-            <a:srgbClr val="E8F8EE"/>
-          </a:solidFill>
-          <a:ln w="12700">
-            <a:solidFill>
-              <a:srgbClr val="06C755"/>
-            </a:solidFill>
-          </a:ln>
-          <a:effectLst/>
-        </p:spPr>
-        <p:style>
-          <a:lnRef idx="1">
-            <a:schemeClr val="accent1"/>
-          </a:lnRef>
-          <a:fillRef idx="3">
-            <a:schemeClr val="accent1"/>
-          </a:fillRef>
-          <a:effectRef idx="2">
-            <a:schemeClr val="accent1"/>
-          </a:effectRef>
-          <a:fontRef idx="minor">
-            <a:schemeClr val="lt1"/>
-          </a:fontRef>
-        </p:style>
-        <p:txBody>
-          <a:bodyPr wrap="square" lIns="54000" tIns="18000" rIns="54000" bIns="18000" rtlCol="0" anchor="ctr"/>
-          <a:lstStyle/>
-          <a:p>
-            <a:pPr algn="ctr">
-              <a:lnSpc>
-                <a:spcPct val="120000"/>
-              </a:lnSpc>
-            </a:pPr>
-            <a:r>
-              <a:rPr sz="1300" b="1">
-                <a:solidFill>
-                  <a:srgbClr val="0B7A3B"/>
-                </a:solidFill>
-                <a:latin typeface="メイリオ"/>
-                <a:ea typeface="メイリオ"/>
-                <a:cs typeface="メイリオ"/>
-              </a:rPr>
-              <a:t>友だちの方 → トーク画面へ</a:t>
-            </a:r>
-          </a:p>
-        </p:txBody>
-      </p:sp>
-      <p:sp>
-        <p:nvSpPr>
           <p:cNvPr id="13" name="Rounded Rectangle 12"/>
           <p:cNvSpPr/>
           <p:nvPr/>
         </p:nvSpPr>
         <p:spPr>
           <a:xfrm>
-            <a:off x="525600" y="3744000"/>
-            <a:ext cx="2904000" cy="2015999"/>
+            <a:off x="525600" y="5838760"/>
+            <a:ext cx="2904000" cy="450000"/>
           </a:xfrm>
           <a:prstGeom prst="roundRect">
             <a:avLst>
@@ -4459,16 +3947,16 @@
           <a:bodyPr wrap="square" lIns="125999" tIns="90000" rIns="108000" bIns="54000" rtlCol="0" anchor="ctr"/>
           <a:lstStyle/>
           <a:p>
-            <a:pPr algn="l">
+            <a:pPr algn="ctr">
               <a:lnSpc>
-                <a:spcPct val="130000"/>
+                <a:spcPct val="100000"/>
               </a:lnSpc>
               <a:spcAft>
                 <a:spcPts val="500"/>
               </a:spcAft>
             </a:pPr>
             <a:r>
-              <a:rPr sz="1600" b="1" dirty="0" err="1">
+              <a:rPr sz="1500" b="1" dirty="0" err="1">
                 <a:solidFill>
                   <a:srgbClr val="1F285A"/>
                 </a:solidFill>
@@ -4481,46 +3969,6 @@
             <a:endParaRPr sz="1250" b="1" dirty="0">
               <a:solidFill>
                 <a:srgbClr val="1F285A"/>
-              </a:solidFill>
-              <a:latin typeface="メイリオ"/>
-              <a:ea typeface="メイリオ"/>
-              <a:cs typeface="メイリオ"/>
-            </a:endParaRPr>
-          </a:p>
-          <a:p>
-            <a:pPr algn="l">
-              <a:lnSpc>
-                <a:spcPct val="130000"/>
-              </a:lnSpc>
-              <a:spcAft>
-                <a:spcPts val="200"/>
-              </a:spcAft>
-            </a:pPr>
-            <a:r>
-              <a:rPr sz="1400" dirty="0" err="1">
-                <a:solidFill>
-                  <a:srgbClr val="333333"/>
-                </a:solidFill>
-                <a:latin typeface="メイリオ"/>
-                <a:ea typeface="メイリオ"/>
-                <a:cs typeface="メイリオ"/>
-              </a:rPr>
-              <a:t>申込みの直後なので、友だちにな</a:t>
-            </a:r>
-            <a:r>
-              <a:rPr lang="ja-JP" altLang="en-US" sz="1400" dirty="0">
-                <a:solidFill>
-                  <a:srgbClr val="333333"/>
-                </a:solidFill>
-                <a:latin typeface="メイリオ"/>
-                <a:ea typeface="メイリオ"/>
-                <a:cs typeface="メイリオ"/>
-              </a:rPr>
-              <a:t>りやすい</a:t>
-            </a:r>
-            <a:endParaRPr sz="1050" dirty="0">
-              <a:solidFill>
-                <a:srgbClr val="333333"/>
               </a:solidFill>
               <a:latin typeface="メイリオ"/>
               <a:ea typeface="メイリオ"/>
@@ -4537,8 +3985,8 @@
         </p:nvSpPr>
         <p:spPr>
           <a:xfrm>
-            <a:off x="3501600" y="3744000"/>
-            <a:ext cx="2904000" cy="2015999"/>
+            <a:off x="3501600" y="5838760"/>
+            <a:ext cx="2904000" cy="450000"/>
           </a:xfrm>
           <a:prstGeom prst="roundRect">
             <a:avLst>
@@ -4571,16 +4019,16 @@
           <a:bodyPr wrap="square" lIns="125999" tIns="90000" rIns="108000" bIns="54000" rtlCol="0" anchor="ctr"/>
           <a:lstStyle/>
           <a:p>
-            <a:pPr algn="l">
+            <a:pPr algn="ctr">
               <a:lnSpc>
-                <a:spcPct val="130000"/>
+                <a:spcPct val="100000"/>
               </a:lnSpc>
               <a:spcAft>
                 <a:spcPts val="500"/>
               </a:spcAft>
             </a:pPr>
             <a:r>
-              <a:rPr sz="1600" b="1" dirty="0" err="1">
+              <a:rPr sz="1500" b="1" dirty="0" err="1">
                 <a:solidFill>
                   <a:srgbClr val="1F285A"/>
                 </a:solidFill>
@@ -4593,86 +4041,6 @@
             <a:endParaRPr sz="1250" b="1" dirty="0">
               <a:solidFill>
                 <a:srgbClr val="1F285A"/>
-              </a:solidFill>
-              <a:latin typeface="メイリオ"/>
-              <a:ea typeface="メイリオ"/>
-              <a:cs typeface="メイリオ"/>
-            </a:endParaRPr>
-          </a:p>
-          <a:p>
-            <a:pPr algn="l">
-              <a:lnSpc>
-                <a:spcPct val="130000"/>
-              </a:lnSpc>
-              <a:spcAft>
-                <a:spcPts val="200"/>
-              </a:spcAft>
-            </a:pPr>
-            <a:r>
-              <a:rPr sz="1400" dirty="0" err="1">
-                <a:solidFill>
-                  <a:srgbClr val="333333"/>
-                </a:solidFill>
-                <a:latin typeface="メイリオ"/>
-                <a:ea typeface="メイリオ"/>
-                <a:cs typeface="メイリオ"/>
-              </a:rPr>
-              <a:t>今の広告で集めた申込みを</a:t>
-            </a:r>
-            <a:r>
-              <a:rPr sz="1400" dirty="0">
-                <a:solidFill>
-                  <a:srgbClr val="333333"/>
-                </a:solidFill>
-                <a:latin typeface="メイリオ"/>
-                <a:ea typeface="メイリオ"/>
-                <a:cs typeface="メイリオ"/>
-              </a:rPr>
-              <a:t>、</a:t>
-            </a:r>
-            <a:endParaRPr lang="en-US" sz="1050" dirty="0">
-              <a:solidFill>
-                <a:srgbClr val="333333"/>
-              </a:solidFill>
-              <a:latin typeface="メイリオ"/>
-              <a:ea typeface="メイリオ"/>
-              <a:cs typeface="メイリオ"/>
-            </a:endParaRPr>
-          </a:p>
-          <a:p>
-            <a:pPr algn="l">
-              <a:lnSpc>
-                <a:spcPct val="130000"/>
-              </a:lnSpc>
-              <a:spcAft>
-                <a:spcPts val="200"/>
-              </a:spcAft>
-            </a:pPr>
-            <a:r>
-              <a:rPr sz="1400" dirty="0" err="1">
-                <a:solidFill>
-                  <a:srgbClr val="333333"/>
-                </a:solidFill>
-                <a:latin typeface="メイリオ"/>
-                <a:ea typeface="メイリオ"/>
-                <a:cs typeface="メイリオ"/>
-              </a:rPr>
-              <a:t>そのままLINE</a:t>
-            </a:r>
-            <a:r>
-              <a:rPr lang="ja-JP" altLang="en-US" sz="1400" dirty="0">
-                <a:solidFill>
-                  <a:srgbClr val="333333"/>
-                </a:solidFill>
-                <a:latin typeface="メイリオ"/>
-                <a:ea typeface="メイリオ"/>
-                <a:cs typeface="メイリオ"/>
-              </a:rPr>
-              <a:t>で当日まで</a:t>
-            </a:r>
-            <a:endParaRPr sz="1050" dirty="0">
-              <a:solidFill>
-                <a:srgbClr val="333333"/>
               </a:solidFill>
               <a:latin typeface="メイリオ"/>
               <a:ea typeface="メイリオ"/>
@@ -4689,8 +4057,8 @@
         </p:nvSpPr>
         <p:spPr>
           <a:xfrm>
-            <a:off x="6477600" y="3744000"/>
-            <a:ext cx="2904000" cy="2015999"/>
+            <a:off x="6477600" y="5838760"/>
+            <a:ext cx="2904000" cy="450000"/>
           </a:xfrm>
           <a:prstGeom prst="roundRect">
             <a:avLst>
@@ -4723,16 +4091,16 @@
           <a:bodyPr wrap="square" lIns="125999" tIns="90000" rIns="108000" bIns="54000" rtlCol="0" anchor="ctr"/>
           <a:lstStyle/>
           <a:p>
-            <a:pPr algn="l">
+            <a:pPr algn="ctr">
               <a:lnSpc>
-                <a:spcPct val="130000"/>
+                <a:spcPct val="100000"/>
               </a:lnSpc>
               <a:spcAft>
                 <a:spcPts val="500"/>
               </a:spcAft>
             </a:pPr>
             <a:r>
-              <a:rPr sz="1600" b="1" dirty="0" err="1">
+              <a:rPr sz="1500" b="1" dirty="0" err="1">
                 <a:solidFill>
                   <a:srgbClr val="1F285A"/>
                 </a:solidFill>
@@ -4751,48 +4119,32 @@
               <a:cs typeface="メイリオ"/>
             </a:endParaRPr>
           </a:p>
-          <a:p>
-            <a:pPr algn="l">
-              <a:lnSpc>
-                <a:spcPct val="130000"/>
-              </a:lnSpc>
-              <a:spcAft>
-                <a:spcPts val="200"/>
-              </a:spcAft>
-            </a:pPr>
-            <a:r>
-              <a:rPr sz="1400" dirty="0" err="1">
-                <a:solidFill>
-                  <a:srgbClr val="333333"/>
-                </a:solidFill>
-                <a:latin typeface="メイリオ"/>
-                <a:ea typeface="メイリオ"/>
-                <a:cs typeface="メイリオ"/>
-              </a:rPr>
-              <a:t>トークに反映し、配信の出し分けにも</a:t>
-            </a:r>
-            <a:r>
-              <a:rPr lang="ja-JP" altLang="en-US" sz="1400" dirty="0">
-                <a:solidFill>
-                  <a:srgbClr val="333333"/>
-                </a:solidFill>
-                <a:latin typeface="メイリオ"/>
-                <a:ea typeface="メイリオ"/>
-                <a:cs typeface="メイリオ"/>
-              </a:rPr>
-              <a:t>有効</a:t>
-            </a:r>
-            <a:endParaRPr sz="1050" dirty="0">
-              <a:solidFill>
-                <a:srgbClr val="333333"/>
-              </a:solidFill>
-              <a:latin typeface="メイリオ"/>
-              <a:ea typeface="メイリオ"/>
-              <a:cs typeface="メイリオ"/>
-            </a:endParaRPr>
-          </a:p>
         </p:txBody>
       </p:sp>
+      <p:pic>
+        <p:nvPicPr>
+          <p:cNvPr id="16" name="サンクスLINEの流れ" descr="thanks_line_flow.png"/>
+          <p:cNvPicPr>
+            <a:picLocks noChangeAspect="1"/>
+          </p:cNvPicPr>
+          <p:nvPr/>
+        </p:nvPicPr>
+        <p:blipFill>
+          <a:blip r:embed="rId3"/>
+          <a:stretch>
+            <a:fillRect/>
+          </a:stretch>
+        </p:blipFill>
+        <p:spPr>
+          <a:xfrm>
+            <a:off x="1172999" y="1494000"/>
+            <a:ext cx="7560000" cy="4254760"/>
+          </a:xfrm>
+          <a:prstGeom prst="rect">
+            <a:avLst/>
+          </a:prstGeom>
+        </p:spPr>
+      </p:pic>
     </p:spTree>
     <p:extLst>
       <p:ext uri="{BB962C8B-B14F-4D97-AF65-F5344CB8AC3E}">

--- a/20261001_サンクスLINEのご提案.pptx
+++ b/20261001_サンクスLINEのご提案.pptx
@@ -3036,305 +3036,14 @@
       </p:cxnSp>
       <p:sp>
         <p:nvSpPr>
-          <p:cNvPr id="5" name="Rounded Rectangle 4"/>
-          <p:cNvSpPr/>
-          <p:nvPr/>
-        </p:nvSpPr>
-        <p:spPr>
-          <a:xfrm>
-            <a:off x="432000" y="2323800"/>
-            <a:ext cx="1872000" cy="1080000"/>
-          </a:xfrm>
-          <a:prstGeom prst="roundRect">
-            <a:avLst>
-              <a:gd name="adj" fmla="val 10000"/>
-            </a:avLst>
-          </a:prstGeom>
-          <a:solidFill>
-            <a:srgbClr val="F4F7FF"/>
-          </a:solidFill>
-          <a:ln w="12700">
-            <a:solidFill>
-              <a:srgbClr val="D9D9D9"/>
-            </a:solidFill>
-          </a:ln>
-          <a:effectLst/>
-        </p:spPr>
-        <p:style>
-          <a:lnRef idx="1">
-            <a:schemeClr val="accent1"/>
-          </a:lnRef>
-          <a:fillRef idx="3">
-            <a:schemeClr val="accent1"/>
-          </a:fillRef>
-          <a:effectRef idx="2">
-            <a:schemeClr val="accent1"/>
-          </a:effectRef>
-          <a:fontRef idx="minor">
-            <a:schemeClr val="lt1"/>
-          </a:fontRef>
-        </p:style>
-        <p:txBody>
-          <a:bodyPr wrap="square" lIns="54000" tIns="18000" rIns="54000" bIns="18000" rtlCol="0" anchor="ctr"/>
-          <a:lstStyle/>
-          <a:p>
-            <a:pPr algn="ctr">
-              <a:lnSpc>
-                <a:spcPct val="120000"/>
-              </a:lnSpc>
-            </a:pPr>
-            <a:r>
-              <a:rPr sz="1500" b="1">
-                <a:solidFill>
-                  <a:srgbClr val="1F285A"/>
-                </a:solidFill>
-                <a:latin typeface="メイリオ"/>
-                <a:ea typeface="メイリオ"/>
-                <a:cs typeface="メイリオ"/>
-              </a:rPr>
-              <a:t>広告</a:t>
-            </a:r>
-          </a:p>
-        </p:txBody>
-      </p:sp>
-      <p:sp>
-        <p:nvSpPr>
-          <p:cNvPr id="6" name="Right Arrow 5"/>
-          <p:cNvSpPr/>
-          <p:nvPr/>
-        </p:nvSpPr>
-        <p:spPr>
-          <a:xfrm>
-            <a:off x="2412000" y="2701801"/>
-            <a:ext cx="324000" cy="324000"/>
-          </a:xfrm>
-          <a:prstGeom prst="rightArrow">
-            <a:avLst/>
-          </a:prstGeom>
-          <a:solidFill>
-            <a:srgbClr val="1F285A"/>
-          </a:solidFill>
-          <a:ln>
-            <a:noFill/>
-          </a:ln>
-          <a:effectLst/>
-        </p:spPr>
-        <p:style>
-          <a:lnRef idx="1">
-            <a:schemeClr val="accent1"/>
-          </a:lnRef>
-          <a:fillRef idx="3">
-            <a:schemeClr val="accent1"/>
-          </a:fillRef>
-          <a:effectRef idx="2">
-            <a:schemeClr val="accent1"/>
-          </a:effectRef>
-          <a:fontRef idx="minor">
-            <a:schemeClr val="lt1"/>
-          </a:fontRef>
-        </p:style>
-        <p:txBody>
-          <a:bodyPr rtlCol="0" anchor="ctr"/>
-          <a:lstStyle/>
-          <a:p>
-            <a:pPr algn="ctr"/>
-            <a:endParaRPr>
-              <a:latin typeface="メイリオ"/>
-              <a:ea typeface="メイリオ"/>
-              <a:cs typeface="メイリオ"/>
-            </a:endParaRPr>
-          </a:p>
-        </p:txBody>
-      </p:sp>
-      <p:sp>
-        <p:nvSpPr>
-          <p:cNvPr id="7" name="Rounded Rectangle 6"/>
-          <p:cNvSpPr/>
-          <p:nvPr/>
-        </p:nvSpPr>
-        <p:spPr>
-          <a:xfrm>
-            <a:off x="2844000" y="2323800"/>
-            <a:ext cx="1872000" cy="1080000"/>
-          </a:xfrm>
-          <a:prstGeom prst="roundRect">
-            <a:avLst>
-              <a:gd name="adj" fmla="val 10000"/>
-            </a:avLst>
-          </a:prstGeom>
-          <a:solidFill>
-            <a:srgbClr val="F4F7FF"/>
-          </a:solidFill>
-          <a:ln w="12700">
-            <a:solidFill>
-              <a:srgbClr val="D9D9D9"/>
-            </a:solidFill>
-          </a:ln>
-          <a:effectLst/>
-        </p:spPr>
-        <p:style>
-          <a:lnRef idx="1">
-            <a:schemeClr val="accent1"/>
-          </a:lnRef>
-          <a:fillRef idx="3">
-            <a:schemeClr val="accent1"/>
-          </a:fillRef>
-          <a:effectRef idx="2">
-            <a:schemeClr val="accent1"/>
-          </a:effectRef>
-          <a:fontRef idx="minor">
-            <a:schemeClr val="lt1"/>
-          </a:fontRef>
-        </p:style>
-        <p:txBody>
-          <a:bodyPr wrap="square" lIns="54000" tIns="18000" rIns="54000" bIns="18000" rtlCol="0" anchor="ctr"/>
-          <a:lstStyle/>
-          <a:p>
-            <a:pPr algn="ctr">
-              <a:lnSpc>
-                <a:spcPct val="120000"/>
-              </a:lnSpc>
-            </a:pPr>
-            <a:r>
-              <a:rPr sz="1500" b="1">
-                <a:solidFill>
-                  <a:srgbClr val="1F285A"/>
-                </a:solidFill>
-                <a:latin typeface="メイリオ"/>
-                <a:ea typeface="メイリオ"/>
-                <a:cs typeface="メイリオ"/>
-              </a:rPr>
-              <a:t>申込み</a:t>
-            </a:r>
-          </a:p>
-          <a:p>
-            <a:pPr algn="ctr">
-              <a:lnSpc>
-                <a:spcPct val="120000"/>
-              </a:lnSpc>
-            </a:pPr>
-            <a:r>
-              <a:rPr sz="1300" b="0">
-                <a:solidFill>
-                  <a:srgbClr val="1F285A"/>
-                </a:solidFill>
-                <a:latin typeface="メイリオ"/>
-                <a:ea typeface="メイリオ"/>
-                <a:cs typeface="メイリオ"/>
-              </a:rPr>
-              <a:t>資料請求・予約・購入</a:t>
-            </a:r>
-          </a:p>
-        </p:txBody>
-      </p:sp>
-      <p:sp>
-        <p:nvSpPr>
-          <p:cNvPr id="8" name="Right Arrow 7"/>
-          <p:cNvSpPr/>
-          <p:nvPr/>
-        </p:nvSpPr>
-        <p:spPr>
-          <a:xfrm>
-            <a:off x="4824000" y="2701801"/>
-            <a:ext cx="324000" cy="324000"/>
-          </a:xfrm>
-          <a:prstGeom prst="rightArrow">
-            <a:avLst/>
-          </a:prstGeom>
-          <a:solidFill>
-            <a:srgbClr val="06C755"/>
-          </a:solidFill>
-          <a:ln>
-            <a:noFill/>
-          </a:ln>
-          <a:effectLst/>
-        </p:spPr>
-        <p:style>
-          <a:lnRef idx="1">
-            <a:schemeClr val="accent1"/>
-          </a:lnRef>
-          <a:fillRef idx="3">
-            <a:schemeClr val="accent1"/>
-          </a:fillRef>
-          <a:effectRef idx="2">
-            <a:schemeClr val="accent1"/>
-          </a:effectRef>
-          <a:fontRef idx="minor">
-            <a:schemeClr val="lt1"/>
-          </a:fontRef>
-        </p:style>
-        <p:txBody>
-          <a:bodyPr rtlCol="0" anchor="ctr"/>
-          <a:lstStyle/>
-          <a:p>
-            <a:pPr algn="ctr"/>
-            <a:endParaRPr>
-              <a:latin typeface="メイリオ"/>
-              <a:ea typeface="メイリオ"/>
-              <a:cs typeface="メイリオ"/>
-            </a:endParaRPr>
-          </a:p>
-        </p:txBody>
-      </p:sp>
-      <p:sp>
-        <p:nvSpPr>
-          <p:cNvPr id="10" name="Right Arrow 9"/>
-          <p:cNvSpPr/>
-          <p:nvPr/>
-        </p:nvSpPr>
-        <p:spPr>
-          <a:xfrm>
-            <a:off x="7236000" y="2701801"/>
-            <a:ext cx="324000" cy="324000"/>
-          </a:xfrm>
-          <a:prstGeom prst="rightArrow">
-            <a:avLst/>
-          </a:prstGeom>
-          <a:solidFill>
-            <a:srgbClr val="06C755"/>
-          </a:solidFill>
-          <a:ln>
-            <a:noFill/>
-          </a:ln>
-          <a:effectLst/>
-        </p:spPr>
-        <p:style>
-          <a:lnRef idx="1">
-            <a:schemeClr val="accent1"/>
-          </a:lnRef>
-          <a:fillRef idx="3">
-            <a:schemeClr val="accent1"/>
-          </a:fillRef>
-          <a:effectRef idx="2">
-            <a:schemeClr val="accent1"/>
-          </a:effectRef>
-          <a:fontRef idx="minor">
-            <a:schemeClr val="lt1"/>
-          </a:fontRef>
-        </p:style>
-        <p:txBody>
-          <a:bodyPr rtlCol="0" anchor="ctr"/>
-          <a:lstStyle/>
-          <a:p>
-            <a:pPr algn="ctr"/>
-            <a:endParaRPr>
-              <a:latin typeface="メイリオ"/>
-              <a:ea typeface="メイリオ"/>
-              <a:cs typeface="メイリオ"/>
-            </a:endParaRPr>
-          </a:p>
-        </p:txBody>
-      </p:sp>
-      <p:sp>
-        <p:nvSpPr>
           <p:cNvPr id="14" name="Rounded Rectangle 13"/>
           <p:cNvSpPr/>
           <p:nvPr/>
         </p:nvSpPr>
         <p:spPr>
           <a:xfrm>
-            <a:off x="432000" y="4212001"/>
-            <a:ext cx="9043200" cy="503999"/>
+            <a:off x="525600" y="5856760"/>
+            <a:ext cx="8854799" cy="503999"/>
           </a:xfrm>
           <a:prstGeom prst="roundRect">
             <a:avLst>
@@ -3386,298 +3095,30 @@
           </a:p>
         </p:txBody>
       </p:sp>
-      <p:sp>
-        <p:nvSpPr>
-          <p:cNvPr id="15" name="Rounded Rectangle 14"/>
-          <p:cNvSpPr/>
+      <p:pic>
+        <p:nvPicPr>
+          <p:cNvPr id="15" name="広告とLINEの役割" descr="thanks_line_journey.png"/>
+          <p:cNvPicPr>
+            <a:picLocks noChangeAspect="1"/>
+          </p:cNvPicPr>
           <p:nvPr/>
-        </p:nvSpPr>
+        </p:nvPicPr>
+        <p:blipFill>
+          <a:blip r:embed="rId3"/>
+          <a:stretch>
+            <a:fillRect/>
+          </a:stretch>
+        </p:blipFill>
         <p:spPr>
           <a:xfrm>
-            <a:off x="5256000" y="2323800"/>
-            <a:ext cx="1872000" cy="1080000"/>
+            <a:off x="1172999" y="1494000"/>
+            <a:ext cx="7560000" cy="4254760"/>
           </a:xfrm>
-          <a:prstGeom prst="roundRect">
-            <a:avLst>
-              <a:gd name="adj" fmla="val 10000"/>
-            </a:avLst>
+          <a:prstGeom prst="rect">
+            <a:avLst/>
           </a:prstGeom>
-          <a:solidFill>
-            <a:srgbClr val="06C755"/>
-          </a:solidFill>
-          <a:ln>
-            <a:noFill/>
-          </a:ln>
-          <a:effectLst/>
         </p:spPr>
-        <p:style>
-          <a:lnRef idx="1">
-            <a:schemeClr val="accent1"/>
-          </a:lnRef>
-          <a:fillRef idx="3">
-            <a:schemeClr val="accent1"/>
-          </a:fillRef>
-          <a:effectRef idx="2">
-            <a:schemeClr val="accent1"/>
-          </a:effectRef>
-          <a:fontRef idx="minor">
-            <a:schemeClr val="lt1"/>
-          </a:fontRef>
-        </p:style>
-        <p:txBody>
-          <a:bodyPr wrap="square" lIns="54000" tIns="18000" rIns="54000" bIns="18000" rtlCol="0" anchor="ctr"/>
-          <a:lstStyle/>
-          <a:p>
-            <a:pPr algn="ctr">
-              <a:lnSpc>
-                <a:spcPct val="120000"/>
-              </a:lnSpc>
-            </a:pPr>
-            <a:r>
-              <a:rPr sz="1600" b="1">
-                <a:solidFill>
-                  <a:srgbClr val="FFFFFF"/>
-                </a:solidFill>
-                <a:latin typeface="メイリオ"/>
-                <a:ea typeface="メイリオ"/>
-                <a:cs typeface="メイリオ"/>
-              </a:rPr>
-              <a:t>LINE</a:t>
-            </a:r>
-          </a:p>
-          <a:p>
-            <a:pPr algn="ctr">
-              <a:lnSpc>
-                <a:spcPct val="120000"/>
-              </a:lnSpc>
-            </a:pPr>
-            <a:r>
-              <a:rPr sz="1400" b="0">
-                <a:solidFill>
-                  <a:srgbClr val="FFFFFF"/>
-                </a:solidFill>
-                <a:latin typeface="メイリオ"/>
-                <a:ea typeface="メイリオ"/>
-                <a:cs typeface="メイリオ"/>
-              </a:rPr>
-              <a:t>リマインド・配信</a:t>
-            </a:r>
-          </a:p>
-          <a:p>
-            <a:pPr algn="ctr">
-              <a:lnSpc>
-                <a:spcPct val="120000"/>
-              </a:lnSpc>
-            </a:pPr>
-            <a:r>
-              <a:rPr sz="1400" b="0">
-                <a:solidFill>
-                  <a:srgbClr val="FFFFFF"/>
-                </a:solidFill>
-                <a:latin typeface="メイリオ"/>
-                <a:ea typeface="メイリオ"/>
-                <a:cs typeface="メイリオ"/>
-              </a:rPr>
-              <a:t>1対1のトーク</a:t>
-            </a:r>
-          </a:p>
-        </p:txBody>
-      </p:sp>
-      <p:sp>
-        <p:nvSpPr>
-          <p:cNvPr id="16" name="Rounded Rectangle 15"/>
-          <p:cNvSpPr/>
-          <p:nvPr/>
-        </p:nvSpPr>
-        <p:spPr>
-          <a:xfrm>
-            <a:off x="7668000" y="2323800"/>
-            <a:ext cx="1807199" cy="1080000"/>
-          </a:xfrm>
-          <a:prstGeom prst="roundRect">
-            <a:avLst>
-              <a:gd name="adj" fmla="val 10000"/>
-            </a:avLst>
-          </a:prstGeom>
-          <a:solidFill>
-            <a:srgbClr val="E8F8EE"/>
-          </a:solidFill>
-          <a:ln w="19050">
-            <a:solidFill>
-              <a:srgbClr val="06C755"/>
-            </a:solidFill>
-          </a:ln>
-          <a:effectLst/>
-        </p:spPr>
-        <p:style>
-          <a:lnRef idx="1">
-            <a:schemeClr val="accent1"/>
-          </a:lnRef>
-          <a:fillRef idx="3">
-            <a:schemeClr val="accent1"/>
-          </a:fillRef>
-          <a:effectRef idx="2">
-            <a:schemeClr val="accent1"/>
-          </a:effectRef>
-          <a:fontRef idx="minor">
-            <a:schemeClr val="lt1"/>
-          </a:fontRef>
-        </p:style>
-        <p:txBody>
-          <a:bodyPr wrap="square" lIns="54000" tIns="18000" rIns="54000" bIns="18000" rtlCol="0" anchor="ctr"/>
-          <a:lstStyle/>
-          <a:p>
-            <a:pPr algn="ctr">
-              <a:lnSpc>
-                <a:spcPct val="120000"/>
-              </a:lnSpc>
-            </a:pPr>
-            <a:r>
-              <a:rPr sz="1500" b="1">
-                <a:solidFill>
-                  <a:srgbClr val="0B7A3B"/>
-                </a:solidFill>
-                <a:latin typeface="メイリオ"/>
-                <a:ea typeface="メイリオ"/>
-                <a:cs typeface="メイリオ"/>
-              </a:rPr>
-              <a:t>来店・成約</a:t>
-            </a:r>
-          </a:p>
-          <a:p>
-            <a:pPr algn="ctr">
-              <a:lnSpc>
-                <a:spcPct val="120000"/>
-              </a:lnSpc>
-            </a:pPr>
-            <a:r>
-              <a:rPr sz="1300" b="0">
-                <a:solidFill>
-                  <a:srgbClr val="0B7A3B"/>
-                </a:solidFill>
-                <a:latin typeface="メイリオ"/>
-                <a:ea typeface="メイリオ"/>
-                <a:cs typeface="メイリオ"/>
-              </a:rPr>
-              <a:t>リピート</a:t>
-            </a:r>
-          </a:p>
-        </p:txBody>
-      </p:sp>
-      <p:sp>
-        <p:nvSpPr>
-          <p:cNvPr id="17" name="Rounded Rectangle 16"/>
-          <p:cNvSpPr/>
-          <p:nvPr/>
-        </p:nvSpPr>
-        <p:spPr>
-          <a:xfrm>
-            <a:off x="432000" y="3529800"/>
-            <a:ext cx="4284000" cy="306000"/>
-          </a:xfrm>
-          <a:prstGeom prst="roundRect">
-            <a:avLst>
-              <a:gd name="adj" fmla="val 18000"/>
-            </a:avLst>
-          </a:prstGeom>
-          <a:solidFill>
-            <a:srgbClr val="1F285A"/>
-          </a:solidFill>
-          <a:ln>
-            <a:noFill/>
-          </a:ln>
-          <a:effectLst/>
-        </p:spPr>
-        <p:style>
-          <a:lnRef idx="1">
-            <a:schemeClr val="accent1"/>
-          </a:lnRef>
-          <a:fillRef idx="3">
-            <a:schemeClr val="accent1"/>
-          </a:fillRef>
-          <a:effectRef idx="2">
-            <a:schemeClr val="accent1"/>
-          </a:effectRef>
-          <a:fontRef idx="minor">
-            <a:schemeClr val="lt1"/>
-          </a:fontRef>
-        </p:style>
-        <p:txBody>
-          <a:bodyPr wrap="square" lIns="36000" tIns="0" rIns="36000" bIns="0" rtlCol="0" anchor="ctr"/>
-          <a:lstStyle/>
-          <a:p>
-            <a:pPr algn="ctr"/>
-            <a:r>
-              <a:rPr sz="1200" b="1">
-                <a:solidFill>
-                  <a:srgbClr val="FFFFFF"/>
-                </a:solidFill>
-                <a:latin typeface="メイリオ"/>
-                <a:ea typeface="メイリオ"/>
-                <a:cs typeface="メイリオ"/>
-              </a:rPr>
-              <a:t>広告で追えるところ：申込みまで</a:t>
-            </a:r>
-          </a:p>
-        </p:txBody>
-      </p:sp>
-      <p:sp>
-        <p:nvSpPr>
-          <p:cNvPr id="18" name="Rounded Rectangle 17"/>
-          <p:cNvSpPr/>
-          <p:nvPr/>
-        </p:nvSpPr>
-        <p:spPr>
-          <a:xfrm>
-            <a:off x="5256000" y="3529800"/>
-            <a:ext cx="4219200" cy="306000"/>
-          </a:xfrm>
-          <a:prstGeom prst="roundRect">
-            <a:avLst>
-              <a:gd name="adj" fmla="val 18000"/>
-            </a:avLst>
-          </a:prstGeom>
-          <a:solidFill>
-            <a:srgbClr val="06C755"/>
-          </a:solidFill>
-          <a:ln>
-            <a:noFill/>
-          </a:ln>
-          <a:effectLst/>
-        </p:spPr>
-        <p:style>
-          <a:lnRef idx="1">
-            <a:schemeClr val="accent1"/>
-          </a:lnRef>
-          <a:fillRef idx="3">
-            <a:schemeClr val="accent1"/>
-          </a:fillRef>
-          <a:effectRef idx="2">
-            <a:schemeClr val="accent1"/>
-          </a:effectRef>
-          <a:fontRef idx="minor">
-            <a:schemeClr val="lt1"/>
-          </a:fontRef>
-        </p:style>
-        <p:txBody>
-          <a:bodyPr wrap="square" lIns="36000" tIns="0" rIns="36000" bIns="0" rtlCol="0" anchor="ctr"/>
-          <a:lstStyle/>
-          <a:p>
-            <a:pPr algn="ctr"/>
-            <a:r>
-              <a:rPr sz="1200" b="1">
-                <a:solidFill>
-                  <a:srgbClr val="FFFFFF"/>
-                </a:solidFill>
-                <a:latin typeface="メイリオ"/>
-                <a:ea typeface="メイリオ"/>
-                <a:cs typeface="メイリオ"/>
-              </a:rPr>
-              <a:t>LINEで追えるところ：来店・成約・リピートまで</a:t>
-            </a:r>
-          </a:p>
-        </p:txBody>
-      </p:sp>
+      </p:pic>
     </p:spTree>
     <p:extLst>
       <p:ext uri="{BB962C8B-B14F-4D97-AF65-F5344CB8AC3E}">
@@ -4366,7 +3807,7 @@
         <p:spPr>
           <a:xfrm>
             <a:off x="525600" y="1998000"/>
-            <a:ext cx="2854800" cy="936000"/>
+            <a:ext cx="2854800" cy="1188000"/>
           </a:xfrm>
           <a:prstGeom prst="roundRect">
             <a:avLst>
@@ -4398,7 +3839,7 @@
           </a:fontRef>
         </p:style>
         <p:txBody>
-          <a:bodyPr wrap="square" lIns="54000" tIns="18000" rIns="54000" bIns="18000" rtlCol="0" anchor="ctr"/>
+          <a:bodyPr wrap="square" lIns="954000" tIns="18000" rIns="54000" bIns="18000" rtlCol="0" anchor="ctr"/>
           <a:lstStyle/>
           <a:p>
             <a:pPr algn="ctr">
@@ -4407,7 +3848,7 @@
               </a:lnSpc>
             </a:pPr>
             <a:r>
-              <a:rPr sz="1100" b="0">
+              <a:rPr sz="1000" b="0">
                 <a:solidFill>
                   <a:srgbClr val="333333"/>
                 </a:solidFill>
@@ -4415,7 +3856,7 @@
                 <a:ea typeface="メイリオ"/>
                 <a:cs typeface="メイリオ"/>
               </a:rPr>
-              <a:t>完了画面からLINEへ（サンクスLINE）</a:t>
+              <a:t>完了画面からLINEへ</a:t>
             </a:r>
           </a:p>
           <a:p>
@@ -4425,7 +3866,7 @@
               </a:lnSpc>
             </a:pPr>
             <a:r>
-              <a:rPr sz="1800" b="1">
+              <a:rPr sz="1700" b="1">
                 <a:solidFill>
                   <a:srgbClr val="1F285A"/>
                 </a:solidFill>
@@ -4433,7 +3874,25 @@
                 <a:ea typeface="メイリオ"/>
                 <a:cs typeface="メイリオ"/>
               </a:rPr>
-              <a:t>来院率 40〜50%改善</a:t>
+              <a:t>来院率</a:t>
+            </a:r>
+          </a:p>
+          <a:p>
+            <a:pPr algn="ctr">
+              <a:lnSpc>
+                <a:spcPct val="120000"/>
+              </a:lnSpc>
+            </a:pPr>
+            <a:r>
+              <a:rPr sz="1700" b="1">
+                <a:solidFill>
+                  <a:srgbClr val="1F285A"/>
+                </a:solidFill>
+                <a:latin typeface="メイリオ"/>
+                <a:ea typeface="メイリオ"/>
+                <a:cs typeface="メイリオ"/>
+              </a:rPr>
+              <a:t>40〜50%改善</a:t>
             </a:r>
           </a:p>
         </p:txBody>
@@ -4508,7 +3967,7 @@
         <p:spPr>
           <a:xfrm>
             <a:off x="3524399" y="1998000"/>
-            <a:ext cx="2854800" cy="936000"/>
+            <a:ext cx="2854800" cy="1188000"/>
           </a:xfrm>
           <a:prstGeom prst="roundRect">
             <a:avLst>
@@ -4540,7 +3999,7 @@
           </a:fontRef>
         </p:style>
         <p:txBody>
-          <a:bodyPr wrap="square" lIns="54000" tIns="18000" rIns="54000" bIns="18000" rtlCol="0" anchor="ctr"/>
+          <a:bodyPr wrap="square" lIns="954000" tIns="18000" rIns="54000" bIns="18000" rtlCol="0" anchor="ctr"/>
           <a:lstStyle/>
           <a:p>
             <a:pPr algn="ctr">
@@ -4549,7 +4008,7 @@
               </a:lnSpc>
             </a:pPr>
             <a:r>
-              <a:rPr sz="1100" b="0">
+              <a:rPr sz="1000" b="0">
                 <a:solidFill>
                   <a:srgbClr val="333333"/>
                 </a:solidFill>
@@ -4567,7 +4026,7 @@
               </a:lnSpc>
             </a:pPr>
             <a:r>
-              <a:rPr sz="1800" b="1">
+              <a:rPr sz="1700" b="1">
                 <a:solidFill>
                   <a:srgbClr val="1F285A"/>
                 </a:solidFill>
@@ -4575,7 +4034,25 @@
                 <a:ea typeface="メイリオ"/>
                 <a:cs typeface="メイリオ"/>
               </a:rPr>
-              <a:t>面談実施率 ＋5ポイント</a:t>
+              <a:t>面談実施率</a:t>
+            </a:r>
+          </a:p>
+          <a:p>
+            <a:pPr algn="ctr">
+              <a:lnSpc>
+                <a:spcPct val="120000"/>
+              </a:lnSpc>
+            </a:pPr>
+            <a:r>
+              <a:rPr sz="1700" b="1">
+                <a:solidFill>
+                  <a:srgbClr val="1F285A"/>
+                </a:solidFill>
+                <a:latin typeface="メイリオ"/>
+                <a:ea typeface="メイリオ"/>
+                <a:cs typeface="メイリオ"/>
+              </a:rPr>
+              <a:t>＋5ポイント</a:t>
             </a:r>
           </a:p>
         </p:txBody>
@@ -4650,7 +4127,7 @@
         <p:spPr>
           <a:xfrm>
             <a:off x="6523200" y="1998000"/>
-            <a:ext cx="2854800" cy="936000"/>
+            <a:ext cx="2854800" cy="1188000"/>
           </a:xfrm>
           <a:prstGeom prst="roundRect">
             <a:avLst>
@@ -4682,7 +4159,7 @@
           </a:fontRef>
         </p:style>
         <p:txBody>
-          <a:bodyPr wrap="square" lIns="54000" tIns="18000" rIns="54000" bIns="18000" rtlCol="0" anchor="ctr"/>
+          <a:bodyPr wrap="square" lIns="954000" tIns="18000" rIns="54000" bIns="18000" rtlCol="0" anchor="ctr"/>
           <a:lstStyle/>
           <a:p>
             <a:pPr algn="ctr">
@@ -4691,7 +4168,7 @@
               </a:lnSpc>
             </a:pPr>
             <a:r>
-              <a:rPr sz="1100" b="0">
+              <a:rPr sz="1000" b="0">
                 <a:solidFill>
                   <a:srgbClr val="333333"/>
                 </a:solidFill>
@@ -4709,7 +4186,7 @@
               </a:lnSpc>
             </a:pPr>
             <a:r>
-              <a:rPr sz="1800" b="1">
+              <a:rPr sz="1700" b="1">
                 <a:solidFill>
                   <a:srgbClr val="1F285A"/>
                 </a:solidFill>
@@ -4717,7 +4194,25 @@
                 <a:ea typeface="メイリオ"/>
                 <a:cs typeface="メイリオ"/>
               </a:rPr>
-              <a:t>友だち追加 約70%</a:t>
+              <a:t>友だち追加</a:t>
+            </a:r>
+          </a:p>
+          <a:p>
+            <a:pPr algn="ctr">
+              <a:lnSpc>
+                <a:spcPct val="120000"/>
+              </a:lnSpc>
+            </a:pPr>
+            <a:r>
+              <a:rPr sz="1700" b="1">
+                <a:solidFill>
+                  <a:srgbClr val="1F285A"/>
+                </a:solidFill>
+                <a:latin typeface="メイリオ"/>
+                <a:ea typeface="メイリオ"/>
+                <a:cs typeface="メイリオ"/>
+              </a:rPr>
+              <a:t>約70%</a:t>
             </a:r>
           </a:p>
         </p:txBody>
@@ -4730,7 +4225,7 @@
         </p:nvSpPr>
         <p:spPr>
           <a:xfrm>
-            <a:off x="525600" y="3024000"/>
+            <a:off x="525600" y="3221999"/>
             <a:ext cx="2854800" cy="324000"/>
           </a:xfrm>
           <a:prstGeom prst="roundRect">
@@ -4791,8 +4286,8 @@
         </p:nvSpPr>
         <p:spPr>
           <a:xfrm>
-            <a:off x="525600" y="3384000"/>
-            <a:ext cx="2854800" cy="936000"/>
+            <a:off x="525600" y="3581999"/>
+            <a:ext cx="2854800" cy="1188000"/>
           </a:xfrm>
           <a:prstGeom prst="roundRect">
             <a:avLst>
@@ -4824,7 +4319,7 @@
           </a:fontRef>
         </p:style>
         <p:txBody>
-          <a:bodyPr wrap="square" lIns="54000" tIns="18000" rIns="54000" bIns="18000" rtlCol="0" anchor="ctr"/>
+          <a:bodyPr wrap="square" lIns="954000" tIns="18000" rIns="54000" bIns="18000" rtlCol="0" anchor="ctr"/>
           <a:lstStyle/>
           <a:p>
             <a:pPr algn="ctr">
@@ -4833,7 +4328,7 @@
               </a:lnSpc>
             </a:pPr>
             <a:r>
-              <a:rPr sz="1100" b="0">
+              <a:rPr sz="1000" b="0">
                 <a:solidFill>
                   <a:srgbClr val="333333"/>
                 </a:solidFill>
@@ -4851,7 +4346,7 @@
               </a:lnSpc>
             </a:pPr>
             <a:r>
-              <a:rPr sz="1800" b="1">
+              <a:rPr sz="1700" b="1">
                 <a:solidFill>
                   <a:srgbClr val="1F285A"/>
                 </a:solidFill>
@@ -4859,7 +4354,25 @@
                 <a:ea typeface="メイリオ"/>
                 <a:cs typeface="メイリオ"/>
               </a:rPr>
-              <a:t>予約数 約120%</a:t>
+              <a:t>予約数</a:t>
+            </a:r>
+          </a:p>
+          <a:p>
+            <a:pPr algn="ctr">
+              <a:lnSpc>
+                <a:spcPct val="120000"/>
+              </a:lnSpc>
+            </a:pPr>
+            <a:r>
+              <a:rPr sz="1700" b="1">
+                <a:solidFill>
+                  <a:srgbClr val="1F285A"/>
+                </a:solidFill>
+                <a:latin typeface="メイリオ"/>
+                <a:ea typeface="メイリオ"/>
+                <a:cs typeface="メイリオ"/>
+              </a:rPr>
+              <a:t>約120%</a:t>
             </a:r>
           </a:p>
         </p:txBody>
@@ -4872,7 +4385,7 @@
         </p:nvSpPr>
         <p:spPr>
           <a:xfrm>
-            <a:off x="3524399" y="3024000"/>
+            <a:off x="3524399" y="3221999"/>
             <a:ext cx="2854800" cy="324000"/>
           </a:xfrm>
           <a:prstGeom prst="roundRect">
@@ -4933,8 +4446,8 @@
         </p:nvSpPr>
         <p:spPr>
           <a:xfrm>
-            <a:off x="3524399" y="3384000"/>
-            <a:ext cx="2854800" cy="936000"/>
+            <a:off x="3524399" y="3581999"/>
+            <a:ext cx="2854800" cy="1188000"/>
           </a:xfrm>
           <a:prstGeom prst="roundRect">
             <a:avLst>
@@ -4966,7 +4479,7 @@
           </a:fontRef>
         </p:style>
         <p:txBody>
-          <a:bodyPr wrap="square" lIns="54000" tIns="18000" rIns="54000" bIns="18000" rtlCol="0" anchor="ctr"/>
+          <a:bodyPr wrap="square" lIns="954000" tIns="18000" rIns="54000" bIns="18000" rtlCol="0" anchor="ctr"/>
           <a:lstStyle/>
           <a:p>
             <a:pPr algn="ctr">
@@ -4975,7 +4488,7 @@
               </a:lnSpc>
             </a:pPr>
             <a:r>
-              <a:rPr sz="1100" b="0">
+              <a:rPr sz="1000" b="0">
                 <a:solidFill>
                   <a:srgbClr val="333333"/>
                 </a:solidFill>
@@ -4993,7 +4506,7 @@
               </a:lnSpc>
             </a:pPr>
             <a:r>
-              <a:rPr sz="1800" b="1">
+              <a:rPr sz="1700" b="1">
                 <a:solidFill>
                   <a:srgbClr val="1F285A"/>
                 </a:solidFill>
@@ -5001,7 +4514,25 @@
                 <a:ea typeface="メイリオ"/>
                 <a:cs typeface="メイリオ"/>
               </a:rPr>
-              <a:t>面談予約率 55%</a:t>
+              <a:t>面談予約率</a:t>
+            </a:r>
+          </a:p>
+          <a:p>
+            <a:pPr algn="ctr">
+              <a:lnSpc>
+                <a:spcPct val="120000"/>
+              </a:lnSpc>
+            </a:pPr>
+            <a:r>
+              <a:rPr sz="1700" b="1">
+                <a:solidFill>
+                  <a:srgbClr val="1F285A"/>
+                </a:solidFill>
+                <a:latin typeface="メイリオ"/>
+                <a:ea typeface="メイリオ"/>
+                <a:cs typeface="メイリオ"/>
+              </a:rPr>
+              <a:t>55%</a:t>
             </a:r>
           </a:p>
         </p:txBody>
@@ -5014,7 +4545,7 @@
         </p:nvSpPr>
         <p:spPr>
           <a:xfrm>
-            <a:off x="6523200" y="3024000"/>
+            <a:off x="6523200" y="3221999"/>
             <a:ext cx="2854800" cy="324000"/>
           </a:xfrm>
           <a:prstGeom prst="roundRect">
@@ -5075,8 +4606,8 @@
         </p:nvSpPr>
         <p:spPr>
           <a:xfrm>
-            <a:off x="6523200" y="3384000"/>
-            <a:ext cx="2854800" cy="936000"/>
+            <a:off x="6523200" y="3581999"/>
+            <a:ext cx="2854800" cy="1188000"/>
           </a:xfrm>
           <a:prstGeom prst="roundRect">
             <a:avLst>
@@ -5108,7 +4639,7 @@
           </a:fontRef>
         </p:style>
         <p:txBody>
-          <a:bodyPr wrap="square" lIns="54000" tIns="18000" rIns="54000" bIns="18000" rtlCol="0" anchor="ctr"/>
+          <a:bodyPr wrap="square" lIns="954000" tIns="18000" rIns="54000" bIns="18000" rtlCol="0" anchor="ctr"/>
           <a:lstStyle/>
           <a:p>
             <a:pPr algn="ctr">
@@ -5117,7 +4648,7 @@
               </a:lnSpc>
             </a:pPr>
             <a:r>
-              <a:rPr sz="1100" b="0">
+              <a:rPr sz="1000" b="0">
                 <a:solidFill>
                   <a:srgbClr val="333333"/>
                 </a:solidFill>
@@ -5135,7 +4666,7 @@
               </a:lnSpc>
             </a:pPr>
             <a:r>
-              <a:rPr sz="1800" b="1">
+              <a:rPr sz="1700" b="1">
                 <a:solidFill>
                   <a:srgbClr val="1F285A"/>
                 </a:solidFill>
@@ -5143,7 +4674,25 @@
                 <a:ea typeface="メイリオ"/>
                 <a:cs typeface="メイリオ"/>
               </a:rPr>
-              <a:t>当日に来店 約40%</a:t>
+              <a:t>当日に来店</a:t>
+            </a:r>
+          </a:p>
+          <a:p>
+            <a:pPr algn="ctr">
+              <a:lnSpc>
+                <a:spcPct val="120000"/>
+              </a:lnSpc>
+            </a:pPr>
+            <a:r>
+              <a:rPr sz="1700" b="1">
+                <a:solidFill>
+                  <a:srgbClr val="1F285A"/>
+                </a:solidFill>
+                <a:latin typeface="メイリオ"/>
+                <a:ea typeface="メイリオ"/>
+                <a:cs typeface="メイリオ"/>
+              </a:rPr>
+              <a:t>約40%</a:t>
             </a:r>
           </a:p>
         </p:txBody>
@@ -5156,7 +4705,7 @@
         </p:nvSpPr>
         <p:spPr>
           <a:xfrm>
-            <a:off x="525600" y="4482000"/>
+            <a:off x="525600" y="4860000"/>
             <a:ext cx="1080000" cy="468000"/>
           </a:xfrm>
           <a:prstGeom prst="roundRect">
@@ -5217,7 +4766,7 @@
         </p:nvSpPr>
         <p:spPr>
           <a:xfrm>
-            <a:off x="1677600" y="4482000"/>
+            <a:off x="1677600" y="4860000"/>
             <a:ext cx="1944000" cy="468000"/>
           </a:xfrm>
           <a:prstGeom prst="roundRect">
@@ -5278,7 +4827,7 @@
         </p:nvSpPr>
         <p:spPr>
           <a:xfrm>
-            <a:off x="3693600" y="4482000"/>
+            <a:off x="3693600" y="4860000"/>
             <a:ext cx="1944000" cy="468000"/>
           </a:xfrm>
           <a:prstGeom prst="roundRect">
@@ -5339,7 +4888,7 @@
         </p:nvSpPr>
         <p:spPr>
           <a:xfrm>
-            <a:off x="5709600" y="4482000"/>
+            <a:off x="5709600" y="4860000"/>
             <a:ext cx="3668400" cy="468000"/>
           </a:xfrm>
           <a:prstGeom prst="rect">
@@ -5390,7 +4939,7 @@
         </p:nvSpPr>
         <p:spPr>
           <a:xfrm>
-            <a:off x="525600" y="5076000"/>
+            <a:off x="525600" y="5400000"/>
             <a:ext cx="8852400" cy="468000"/>
           </a:xfrm>
           <a:prstGeom prst="roundRect">
@@ -5451,7 +5000,7 @@
         </p:nvSpPr>
         <p:spPr>
           <a:xfrm>
-            <a:off x="525600" y="5616000"/>
+            <a:off x="525600" y="5903999"/>
             <a:ext cx="8852400" cy="288000"/>
           </a:xfrm>
           <a:prstGeom prst="rect">
@@ -5484,6 +5033,150 @@
           </a:p>
         </p:txBody>
       </p:sp>
+      <p:pic>
+        <p:nvPicPr>
+          <p:cNvPr id="24" name="Picture 23" descr="thanks_icon_beauty.png"/>
+          <p:cNvPicPr>
+            <a:picLocks noChangeAspect="1"/>
+          </p:cNvPicPr>
+          <p:nvPr/>
+        </p:nvPicPr>
+        <p:blipFill>
+          <a:blip r:embed="rId2"/>
+          <a:stretch>
+            <a:fillRect/>
+          </a:stretch>
+        </p:blipFill>
+        <p:spPr>
+          <a:xfrm>
+            <a:off x="615600" y="2178000"/>
+            <a:ext cx="827999" cy="827999"/>
+          </a:xfrm>
+          <a:prstGeom prst="rect">
+            <a:avLst/>
+          </a:prstGeom>
+        </p:spPr>
+      </p:pic>
+      <p:pic>
+        <p:nvPicPr>
+          <p:cNvPr id="25" name="Picture 24" descr="thanks_icon_hoken.png"/>
+          <p:cNvPicPr>
+            <a:picLocks noChangeAspect="1"/>
+          </p:cNvPicPr>
+          <p:nvPr/>
+        </p:nvPicPr>
+        <p:blipFill>
+          <a:blip r:embed="rId3"/>
+          <a:stretch>
+            <a:fillRect/>
+          </a:stretch>
+        </p:blipFill>
+        <p:spPr>
+          <a:xfrm>
+            <a:off x="3614399" y="2178000"/>
+            <a:ext cx="827999" cy="827999"/>
+          </a:xfrm>
+          <a:prstGeom prst="rect">
+            <a:avLst/>
+          </a:prstGeom>
+        </p:spPr>
+      </p:pic>
+      <p:pic>
+        <p:nvPicPr>
+          <p:cNvPr id="26" name="Picture 25" descr="thanks_icon_bus.png"/>
+          <p:cNvPicPr>
+            <a:picLocks noChangeAspect="1"/>
+          </p:cNvPicPr>
+          <p:nvPr/>
+        </p:nvPicPr>
+        <p:blipFill>
+          <a:blip r:embed="rId4"/>
+          <a:stretch>
+            <a:fillRect/>
+          </a:stretch>
+        </p:blipFill>
+        <p:spPr>
+          <a:xfrm>
+            <a:off x="6613200" y="2178000"/>
+            <a:ext cx="827999" cy="827999"/>
+          </a:xfrm>
+          <a:prstGeom prst="rect">
+            <a:avLst/>
+          </a:prstGeom>
+        </p:spPr>
+      </p:pic>
+      <p:pic>
+        <p:nvPicPr>
+          <p:cNvPr id="27" name="Picture 26" descr="thanks_icon_hifuka.png"/>
+          <p:cNvPicPr>
+            <a:picLocks noChangeAspect="1"/>
+          </p:cNvPicPr>
+          <p:nvPr/>
+        </p:nvPicPr>
+        <p:blipFill>
+          <a:blip r:embed="rId5"/>
+          <a:stretch>
+            <a:fillRect/>
+          </a:stretch>
+        </p:blipFill>
+        <p:spPr>
+          <a:xfrm>
+            <a:off x="615600" y="3761999"/>
+            <a:ext cx="827999" cy="827999"/>
+          </a:xfrm>
+          <a:prstGeom prst="rect">
+            <a:avLst/>
+          </a:prstGeom>
+        </p:spPr>
+      </p:pic>
+      <p:pic>
+        <p:nvPicPr>
+          <p:cNvPr id="28" name="Picture 27" descr="thanks_icon_shushoku.png"/>
+          <p:cNvPicPr>
+            <a:picLocks noChangeAspect="1"/>
+          </p:cNvPicPr>
+          <p:nvPr/>
+        </p:nvPicPr>
+        <p:blipFill>
+          <a:blip r:embed="rId6"/>
+          <a:stretch>
+            <a:fillRect/>
+          </a:stretch>
+        </p:blipFill>
+        <p:spPr>
+          <a:xfrm>
+            <a:off x="3614399" y="3761999"/>
+            <a:ext cx="827999" cy="827999"/>
+          </a:xfrm>
+          <a:prstGeom prst="rect">
+            <a:avLst/>
+          </a:prstGeom>
+        </p:spPr>
+      </p:pic>
+      <p:pic>
+        <p:nvPicPr>
+          <p:cNvPr id="29" name="Picture 28" descr="thanks_icon_cafe.png"/>
+          <p:cNvPicPr>
+            <a:picLocks noChangeAspect="1"/>
+          </p:cNvPicPr>
+          <p:nvPr/>
+        </p:nvPicPr>
+        <p:blipFill>
+          <a:blip r:embed="rId7"/>
+          <a:stretch>
+            <a:fillRect/>
+          </a:stretch>
+        </p:blipFill>
+        <p:spPr>
+          <a:xfrm>
+            <a:off x="6613200" y="3761999"/>
+            <a:ext cx="827999" cy="827999"/>
+          </a:xfrm>
+          <a:prstGeom prst="rect">
+            <a:avLst/>
+          </a:prstGeom>
+        </p:spPr>
+      </p:pic>
     </p:spTree>
     <p:extLst>
       <p:ext uri="{BB962C8B-B14F-4D97-AF65-F5344CB8AC3E}">

--- a/20261001_サンクスLINEのご提案.pptx
+++ b/20261001_サンクスLINEのご提案.pptx
@@ -3648,7 +3648,7 @@
                 <a:ea typeface="メイリオ"/>
                 <a:cs typeface="メイリオ"/>
               </a:rPr>
-              <a:t>実績と費用｜LINEで追うと、来店・面談が伸びる</a:t>
+              <a:t>実績と費用</a:t>
             </a:r>
           </a:p>
         </p:txBody>
@@ -3739,1208 +3739,14 @@
       </p:cxnSp>
       <p:sp>
         <p:nvSpPr>
-          <p:cNvPr id="6" name="Rounded Rectangle 8"/>
-          <p:cNvSpPr/>
-          <p:nvPr/>
-        </p:nvSpPr>
-        <p:spPr>
-          <a:xfrm>
-            <a:off x="525600" y="1638000"/>
-            <a:ext cx="2854800" cy="324000"/>
-          </a:xfrm>
-          <a:prstGeom prst="roundRect">
-            <a:avLst>
-              <a:gd name="adj" fmla="val 10000"/>
-            </a:avLst>
-          </a:prstGeom>
-          <a:solidFill>
-            <a:srgbClr val="06C755"/>
-          </a:solidFill>
-          <a:ln>
-            <a:noFill/>
-          </a:ln>
-          <a:effectLst/>
-        </p:spPr>
-        <p:style>
-          <a:lnRef idx="1">
-            <a:schemeClr val="accent1"/>
-          </a:lnRef>
-          <a:fillRef idx="3">
-            <a:schemeClr val="accent1"/>
-          </a:fillRef>
-          <a:effectRef idx="2">
-            <a:schemeClr val="accent1"/>
-          </a:effectRef>
-          <a:fontRef idx="minor">
-            <a:schemeClr val="lt1"/>
-          </a:fontRef>
-        </p:style>
-        <p:txBody>
-          <a:bodyPr wrap="square" lIns="54000" tIns="18000" rIns="54000" bIns="18000" rtlCol="0" anchor="ctr"/>
-          <a:lstStyle/>
-          <a:p>
-            <a:pPr algn="ctr">
-              <a:lnSpc>
-                <a:spcPct val="120000"/>
-              </a:lnSpc>
-            </a:pPr>
-            <a:r>
-              <a:rPr sz="1400" b="1">
-                <a:solidFill>
-                  <a:srgbClr val="FFFFFF"/>
-                </a:solidFill>
-                <a:latin typeface="メイリオ"/>
-                <a:ea typeface="メイリオ"/>
-                <a:cs typeface="メイリオ"/>
-              </a:rPr>
-              <a:t>弊社実績｜美容クリニック</a:t>
-            </a:r>
-          </a:p>
-        </p:txBody>
-      </p:sp>
-      <p:sp>
-        <p:nvSpPr>
-          <p:cNvPr id="7" name="Rounded Rectangle 6"/>
-          <p:cNvSpPr/>
-          <p:nvPr/>
-        </p:nvSpPr>
-        <p:spPr>
-          <a:xfrm>
-            <a:off x="525600" y="1998000"/>
-            <a:ext cx="2854800" cy="1188000"/>
-          </a:xfrm>
-          <a:prstGeom prst="roundRect">
-            <a:avLst>
-              <a:gd name="adj" fmla="val 10000"/>
-            </a:avLst>
-          </a:prstGeom>
-          <a:solidFill>
-            <a:srgbClr val="F4F7FF"/>
-          </a:solidFill>
-          <a:ln w="12700">
-            <a:solidFill>
-              <a:srgbClr val="D9D9D9"/>
-            </a:solidFill>
-          </a:ln>
-          <a:effectLst/>
-        </p:spPr>
-        <p:style>
-          <a:lnRef idx="1">
-            <a:schemeClr val="accent1"/>
-          </a:lnRef>
-          <a:fillRef idx="3">
-            <a:schemeClr val="accent1"/>
-          </a:fillRef>
-          <a:effectRef idx="2">
-            <a:schemeClr val="accent1"/>
-          </a:effectRef>
-          <a:fontRef idx="minor">
-            <a:schemeClr val="lt1"/>
-          </a:fontRef>
-        </p:style>
-        <p:txBody>
-          <a:bodyPr wrap="square" lIns="954000" tIns="18000" rIns="54000" bIns="18000" rtlCol="0" anchor="ctr"/>
-          <a:lstStyle/>
-          <a:p>
-            <a:pPr algn="ctr">
-              <a:lnSpc>
-                <a:spcPct val="120000"/>
-              </a:lnSpc>
-            </a:pPr>
-            <a:r>
-              <a:rPr sz="1000" b="0">
-                <a:solidFill>
-                  <a:srgbClr val="333333"/>
-                </a:solidFill>
-                <a:latin typeface="メイリオ"/>
-                <a:ea typeface="メイリオ"/>
-                <a:cs typeface="メイリオ"/>
-              </a:rPr>
-              <a:t>完了画面からLINEへ</a:t>
-            </a:r>
-          </a:p>
-          <a:p>
-            <a:pPr algn="ctr">
-              <a:lnSpc>
-                <a:spcPct val="120000"/>
-              </a:lnSpc>
-            </a:pPr>
-            <a:r>
-              <a:rPr sz="1700" b="1">
-                <a:solidFill>
-                  <a:srgbClr val="1F285A"/>
-                </a:solidFill>
-                <a:latin typeface="メイリオ"/>
-                <a:ea typeface="メイリオ"/>
-                <a:cs typeface="メイリオ"/>
-              </a:rPr>
-              <a:t>来院率</a:t>
-            </a:r>
-          </a:p>
-          <a:p>
-            <a:pPr algn="ctr">
-              <a:lnSpc>
-                <a:spcPct val="120000"/>
-              </a:lnSpc>
-            </a:pPr>
-            <a:r>
-              <a:rPr sz="1700" b="1">
-                <a:solidFill>
-                  <a:srgbClr val="1F285A"/>
-                </a:solidFill>
-                <a:latin typeface="メイリオ"/>
-                <a:ea typeface="メイリオ"/>
-                <a:cs typeface="メイリオ"/>
-              </a:rPr>
-              <a:t>40〜50%改善</a:t>
-            </a:r>
-          </a:p>
-        </p:txBody>
-      </p:sp>
-      <p:sp>
-        <p:nvSpPr>
-          <p:cNvPr id="8" name="Rounded Rectangle 4"/>
-          <p:cNvSpPr/>
-          <p:nvPr/>
-        </p:nvSpPr>
-        <p:spPr>
-          <a:xfrm>
-            <a:off x="3524399" y="1638000"/>
-            <a:ext cx="2854800" cy="324000"/>
-          </a:xfrm>
-          <a:prstGeom prst="roundRect">
-            <a:avLst>
-              <a:gd name="adj" fmla="val 10000"/>
-            </a:avLst>
-          </a:prstGeom>
-          <a:solidFill>
-            <a:srgbClr val="1F285A"/>
-          </a:solidFill>
-          <a:ln>
-            <a:noFill/>
-          </a:ln>
-          <a:effectLst/>
-        </p:spPr>
-        <p:style>
-          <a:lnRef idx="1">
-            <a:schemeClr val="accent1"/>
-          </a:lnRef>
-          <a:fillRef idx="3">
-            <a:schemeClr val="accent1"/>
-          </a:fillRef>
-          <a:effectRef idx="2">
-            <a:schemeClr val="accent1"/>
-          </a:effectRef>
-          <a:fontRef idx="minor">
-            <a:schemeClr val="lt1"/>
-          </a:fontRef>
-        </p:style>
-        <p:txBody>
-          <a:bodyPr wrap="square" lIns="54000" tIns="18000" rIns="54000" bIns="18000" rtlCol="0" anchor="ctr"/>
-          <a:lstStyle/>
-          <a:p>
-            <a:pPr algn="ctr">
-              <a:lnSpc>
-                <a:spcPct val="120000"/>
-              </a:lnSpc>
-            </a:pPr>
-            <a:r>
-              <a:rPr sz="1400" b="1">
-                <a:solidFill>
-                  <a:srgbClr val="FFFFFF"/>
-                </a:solidFill>
-                <a:latin typeface="メイリオ"/>
-                <a:ea typeface="メイリオ"/>
-                <a:cs typeface="メイリオ"/>
-              </a:rPr>
-              <a:t>保険見直し本舗</a:t>
-            </a:r>
-          </a:p>
-        </p:txBody>
-      </p:sp>
-      <p:sp>
-        <p:nvSpPr>
-          <p:cNvPr id="9" name="Rounded Rectangle 6"/>
-          <p:cNvSpPr/>
-          <p:nvPr/>
-        </p:nvSpPr>
-        <p:spPr>
-          <a:xfrm>
-            <a:off x="3524399" y="1998000"/>
-            <a:ext cx="2854800" cy="1188000"/>
-          </a:xfrm>
-          <a:prstGeom prst="roundRect">
-            <a:avLst>
-              <a:gd name="adj" fmla="val 10000"/>
-            </a:avLst>
-          </a:prstGeom>
-          <a:solidFill>
-            <a:srgbClr val="F4F7FF"/>
-          </a:solidFill>
-          <a:ln w="12700">
-            <a:solidFill>
-              <a:srgbClr val="D9D9D9"/>
-            </a:solidFill>
-          </a:ln>
-          <a:effectLst/>
-        </p:spPr>
-        <p:style>
-          <a:lnRef idx="1">
-            <a:schemeClr val="accent1"/>
-          </a:lnRef>
-          <a:fillRef idx="3">
-            <a:schemeClr val="accent1"/>
-          </a:fillRef>
-          <a:effectRef idx="2">
-            <a:schemeClr val="accent1"/>
-          </a:effectRef>
-          <a:fontRef idx="minor">
-            <a:schemeClr val="lt1"/>
-          </a:fontRef>
-        </p:style>
-        <p:txBody>
-          <a:bodyPr wrap="square" lIns="954000" tIns="18000" rIns="54000" bIns="18000" rtlCol="0" anchor="ctr"/>
-          <a:lstStyle/>
-          <a:p>
-            <a:pPr algn="ctr">
-              <a:lnSpc>
-                <a:spcPct val="120000"/>
-              </a:lnSpc>
-            </a:pPr>
-            <a:r>
-              <a:rPr sz="1000" b="0">
-                <a:solidFill>
-                  <a:srgbClr val="333333"/>
-                </a:solidFill>
-                <a:latin typeface="メイリオ"/>
-                <a:ea typeface="メイリオ"/>
-                <a:cs typeface="メイリオ"/>
-              </a:rPr>
-              <a:t>予約日時をLINEでリマインド</a:t>
-            </a:r>
-          </a:p>
-          <a:p>
-            <a:pPr algn="ctr">
-              <a:lnSpc>
-                <a:spcPct val="120000"/>
-              </a:lnSpc>
-            </a:pPr>
-            <a:r>
-              <a:rPr sz="1700" b="1">
-                <a:solidFill>
-                  <a:srgbClr val="1F285A"/>
-                </a:solidFill>
-                <a:latin typeface="メイリオ"/>
-                <a:ea typeface="メイリオ"/>
-                <a:cs typeface="メイリオ"/>
-              </a:rPr>
-              <a:t>面談実施率</a:t>
-            </a:r>
-          </a:p>
-          <a:p>
-            <a:pPr algn="ctr">
-              <a:lnSpc>
-                <a:spcPct val="120000"/>
-              </a:lnSpc>
-            </a:pPr>
-            <a:r>
-              <a:rPr sz="1700" b="1">
-                <a:solidFill>
-                  <a:srgbClr val="1F285A"/>
-                </a:solidFill>
-                <a:latin typeface="メイリオ"/>
-                <a:ea typeface="メイリオ"/>
-                <a:cs typeface="メイリオ"/>
-              </a:rPr>
-              <a:t>＋5ポイント</a:t>
-            </a:r>
-          </a:p>
-        </p:txBody>
-      </p:sp>
-      <p:sp>
-        <p:nvSpPr>
-          <p:cNvPr id="10" name="Rounded Rectangle 4"/>
-          <p:cNvSpPr/>
-          <p:nvPr/>
-        </p:nvSpPr>
-        <p:spPr>
-          <a:xfrm>
-            <a:off x="6523200" y="1638000"/>
-            <a:ext cx="2854800" cy="324000"/>
-          </a:xfrm>
-          <a:prstGeom prst="roundRect">
-            <a:avLst>
-              <a:gd name="adj" fmla="val 10000"/>
-            </a:avLst>
-          </a:prstGeom>
-          <a:solidFill>
-            <a:srgbClr val="1F285A"/>
-          </a:solidFill>
-          <a:ln>
-            <a:noFill/>
-          </a:ln>
-          <a:effectLst/>
-        </p:spPr>
-        <p:style>
-          <a:lnRef idx="1">
-            <a:schemeClr val="accent1"/>
-          </a:lnRef>
-          <a:fillRef idx="3">
-            <a:schemeClr val="accent1"/>
-          </a:fillRef>
-          <a:effectRef idx="2">
-            <a:schemeClr val="accent1"/>
-          </a:effectRef>
-          <a:fontRef idx="minor">
-            <a:schemeClr val="lt1"/>
-          </a:fontRef>
-        </p:style>
-        <p:txBody>
-          <a:bodyPr wrap="square" lIns="54000" tIns="18000" rIns="54000" bIns="18000" rtlCol="0" anchor="ctr"/>
-          <a:lstStyle/>
-          <a:p>
-            <a:pPr algn="ctr">
-              <a:lnSpc>
-                <a:spcPct val="120000"/>
-              </a:lnSpc>
-            </a:pPr>
-            <a:r>
-              <a:rPr sz="1400" b="1">
-                <a:solidFill>
-                  <a:srgbClr val="FFFFFF"/>
-                </a:solidFill>
-                <a:latin typeface="メイリオ"/>
-                <a:ea typeface="メイリオ"/>
-                <a:cs typeface="メイリオ"/>
-              </a:rPr>
-              <a:t>琴平バス（観光バス）</a:t>
-            </a:r>
-          </a:p>
-        </p:txBody>
-      </p:sp>
-      <p:sp>
-        <p:nvSpPr>
-          <p:cNvPr id="11" name="Rounded Rectangle 6"/>
-          <p:cNvSpPr/>
-          <p:nvPr/>
-        </p:nvSpPr>
-        <p:spPr>
-          <a:xfrm>
-            <a:off x="6523200" y="1998000"/>
-            <a:ext cx="2854800" cy="1188000"/>
-          </a:xfrm>
-          <a:prstGeom prst="roundRect">
-            <a:avLst>
-              <a:gd name="adj" fmla="val 10000"/>
-            </a:avLst>
-          </a:prstGeom>
-          <a:solidFill>
-            <a:srgbClr val="F4F7FF"/>
-          </a:solidFill>
-          <a:ln w="12700">
-            <a:solidFill>
-              <a:srgbClr val="D9D9D9"/>
-            </a:solidFill>
-          </a:ln>
-          <a:effectLst/>
-        </p:spPr>
-        <p:style>
-          <a:lnRef idx="1">
-            <a:schemeClr val="accent1"/>
-          </a:lnRef>
-          <a:fillRef idx="3">
-            <a:schemeClr val="accent1"/>
-          </a:fillRef>
-          <a:effectRef idx="2">
-            <a:schemeClr val="accent1"/>
-          </a:effectRef>
-          <a:fontRef idx="minor">
-            <a:schemeClr val="lt1"/>
-          </a:fontRef>
-        </p:style>
-        <p:txBody>
-          <a:bodyPr wrap="square" lIns="954000" tIns="18000" rIns="54000" bIns="18000" rtlCol="0" anchor="ctr"/>
-          <a:lstStyle/>
-          <a:p>
-            <a:pPr algn="ctr">
-              <a:lnSpc>
-                <a:spcPct val="120000"/>
-              </a:lnSpc>
-            </a:pPr>
-            <a:r>
-              <a:rPr sz="1000" b="0">
-                <a:solidFill>
-                  <a:srgbClr val="333333"/>
-                </a:solidFill>
-                <a:latin typeface="メイリオ"/>
-                <a:ea typeface="メイリオ"/>
-                <a:cs typeface="メイリオ"/>
-              </a:rPr>
-              <a:t>予約の通知をLINEで受け取った方のうち</a:t>
-            </a:r>
-          </a:p>
-          <a:p>
-            <a:pPr algn="ctr">
-              <a:lnSpc>
-                <a:spcPct val="120000"/>
-              </a:lnSpc>
-            </a:pPr>
-            <a:r>
-              <a:rPr sz="1700" b="1">
-                <a:solidFill>
-                  <a:srgbClr val="1F285A"/>
-                </a:solidFill>
-                <a:latin typeface="メイリオ"/>
-                <a:ea typeface="メイリオ"/>
-                <a:cs typeface="メイリオ"/>
-              </a:rPr>
-              <a:t>友だち追加</a:t>
-            </a:r>
-          </a:p>
-          <a:p>
-            <a:pPr algn="ctr">
-              <a:lnSpc>
-                <a:spcPct val="120000"/>
-              </a:lnSpc>
-            </a:pPr>
-            <a:r>
-              <a:rPr sz="1700" b="1">
-                <a:solidFill>
-                  <a:srgbClr val="1F285A"/>
-                </a:solidFill>
-                <a:latin typeface="メイリオ"/>
-                <a:ea typeface="メイリオ"/>
-                <a:cs typeface="メイリオ"/>
-              </a:rPr>
-              <a:t>約70%</a:t>
-            </a:r>
-          </a:p>
-        </p:txBody>
-      </p:sp>
-      <p:sp>
-        <p:nvSpPr>
-          <p:cNvPr id="12" name="Rounded Rectangle 4"/>
-          <p:cNvSpPr/>
-          <p:nvPr/>
-        </p:nvSpPr>
-        <p:spPr>
-          <a:xfrm>
-            <a:off x="525600" y="3221999"/>
-            <a:ext cx="2854800" cy="324000"/>
-          </a:xfrm>
-          <a:prstGeom prst="roundRect">
-            <a:avLst>
-              <a:gd name="adj" fmla="val 10000"/>
-            </a:avLst>
-          </a:prstGeom>
-          <a:solidFill>
-            <a:srgbClr val="1F285A"/>
-          </a:solidFill>
-          <a:ln>
-            <a:noFill/>
-          </a:ln>
-          <a:effectLst/>
-        </p:spPr>
-        <p:style>
-          <a:lnRef idx="1">
-            <a:schemeClr val="accent1"/>
-          </a:lnRef>
-          <a:fillRef idx="3">
-            <a:schemeClr val="accent1"/>
-          </a:fillRef>
-          <a:effectRef idx="2">
-            <a:schemeClr val="accent1"/>
-          </a:effectRef>
-          <a:fontRef idx="minor">
-            <a:schemeClr val="lt1"/>
-          </a:fontRef>
-        </p:style>
-        <p:txBody>
-          <a:bodyPr wrap="square" lIns="54000" tIns="18000" rIns="54000" bIns="18000" rtlCol="0" anchor="ctr"/>
-          <a:lstStyle/>
-          <a:p>
-            <a:pPr algn="ctr">
-              <a:lnSpc>
-                <a:spcPct val="120000"/>
-              </a:lnSpc>
-            </a:pPr>
-            <a:r>
-              <a:rPr sz="1400" b="1">
-                <a:solidFill>
-                  <a:srgbClr val="FFFFFF"/>
-                </a:solidFill>
-                <a:latin typeface="メイリオ"/>
-                <a:ea typeface="メイリオ"/>
-                <a:cs typeface="メイリオ"/>
-              </a:rPr>
-              <a:t>皮膚科クリニック</a:t>
-            </a:r>
-          </a:p>
-        </p:txBody>
-      </p:sp>
-      <p:sp>
-        <p:nvSpPr>
-          <p:cNvPr id="13" name="Rounded Rectangle 6"/>
-          <p:cNvSpPr/>
-          <p:nvPr/>
-        </p:nvSpPr>
-        <p:spPr>
-          <a:xfrm>
-            <a:off x="525600" y="3581999"/>
-            <a:ext cx="2854800" cy="1188000"/>
-          </a:xfrm>
-          <a:prstGeom prst="roundRect">
-            <a:avLst>
-              <a:gd name="adj" fmla="val 10000"/>
-            </a:avLst>
-          </a:prstGeom>
-          <a:solidFill>
-            <a:srgbClr val="F4F7FF"/>
-          </a:solidFill>
-          <a:ln w="12700">
-            <a:solidFill>
-              <a:srgbClr val="D9D9D9"/>
-            </a:solidFill>
-          </a:ln>
-          <a:effectLst/>
-        </p:spPr>
-        <p:style>
-          <a:lnRef idx="1">
-            <a:schemeClr val="accent1"/>
-          </a:lnRef>
-          <a:fillRef idx="3">
-            <a:schemeClr val="accent1"/>
-          </a:fillRef>
-          <a:effectRef idx="2">
-            <a:schemeClr val="accent1"/>
-          </a:effectRef>
-          <a:fontRef idx="minor">
-            <a:schemeClr val="lt1"/>
-          </a:fontRef>
-        </p:style>
-        <p:txBody>
-          <a:bodyPr wrap="square" lIns="954000" tIns="18000" rIns="54000" bIns="18000" rtlCol="0" anchor="ctr"/>
-          <a:lstStyle/>
-          <a:p>
-            <a:pPr algn="ctr">
-              <a:lnSpc>
-                <a:spcPct val="120000"/>
-              </a:lnSpc>
-            </a:pPr>
-            <a:r>
-              <a:rPr sz="1000" b="0">
-                <a:solidFill>
-                  <a:srgbClr val="333333"/>
-                </a:solidFill>
-                <a:latin typeface="メイリオ"/>
-                <a:ea typeface="メイリオ"/>
-                <a:cs typeface="メイリオ"/>
-              </a:rPr>
-              <a:t>友だち追加後のステップ配信</a:t>
-            </a:r>
-          </a:p>
-          <a:p>
-            <a:pPr algn="ctr">
-              <a:lnSpc>
-                <a:spcPct val="120000"/>
-              </a:lnSpc>
-            </a:pPr>
-            <a:r>
-              <a:rPr sz="1700" b="1">
-                <a:solidFill>
-                  <a:srgbClr val="1F285A"/>
-                </a:solidFill>
-                <a:latin typeface="メイリオ"/>
-                <a:ea typeface="メイリオ"/>
-                <a:cs typeface="メイリオ"/>
-              </a:rPr>
-              <a:t>予約数</a:t>
-            </a:r>
-          </a:p>
-          <a:p>
-            <a:pPr algn="ctr">
-              <a:lnSpc>
-                <a:spcPct val="120000"/>
-              </a:lnSpc>
-            </a:pPr>
-            <a:r>
-              <a:rPr sz="1700" b="1">
-                <a:solidFill>
-                  <a:srgbClr val="1F285A"/>
-                </a:solidFill>
-                <a:latin typeface="メイリオ"/>
-                <a:ea typeface="メイリオ"/>
-                <a:cs typeface="メイリオ"/>
-              </a:rPr>
-              <a:t>約120%</a:t>
-            </a:r>
-          </a:p>
-        </p:txBody>
-      </p:sp>
-      <p:sp>
-        <p:nvSpPr>
-          <p:cNvPr id="14" name="Rounded Rectangle 4"/>
-          <p:cNvSpPr/>
-          <p:nvPr/>
-        </p:nvSpPr>
-        <p:spPr>
-          <a:xfrm>
-            <a:off x="3524399" y="3221999"/>
-            <a:ext cx="2854800" cy="324000"/>
-          </a:xfrm>
-          <a:prstGeom prst="roundRect">
-            <a:avLst>
-              <a:gd name="adj" fmla="val 10000"/>
-            </a:avLst>
-          </a:prstGeom>
-          <a:solidFill>
-            <a:srgbClr val="1F285A"/>
-          </a:solidFill>
-          <a:ln>
-            <a:noFill/>
-          </a:ln>
-          <a:effectLst/>
-        </p:spPr>
-        <p:style>
-          <a:lnRef idx="1">
-            <a:schemeClr val="accent1"/>
-          </a:lnRef>
-          <a:fillRef idx="3">
-            <a:schemeClr val="accent1"/>
-          </a:fillRef>
-          <a:effectRef idx="2">
-            <a:schemeClr val="accent1"/>
-          </a:effectRef>
-          <a:fontRef idx="minor">
-            <a:schemeClr val="lt1"/>
-          </a:fontRef>
-        </p:style>
-        <p:txBody>
-          <a:bodyPr wrap="square" lIns="54000" tIns="18000" rIns="54000" bIns="18000" rtlCol="0" anchor="ctr"/>
-          <a:lstStyle/>
-          <a:p>
-            <a:pPr algn="ctr">
-              <a:lnSpc>
-                <a:spcPct val="120000"/>
-              </a:lnSpc>
-            </a:pPr>
-            <a:r>
-              <a:rPr sz="1400" b="1">
-                <a:solidFill>
-                  <a:srgbClr val="FFFFFF"/>
-                </a:solidFill>
-                <a:latin typeface="メイリオ"/>
-                <a:ea typeface="メイリオ"/>
-                <a:cs typeface="メイリオ"/>
-              </a:rPr>
-              <a:t>UZUZ（就職支援）</a:t>
-            </a:r>
-          </a:p>
-        </p:txBody>
-      </p:sp>
-      <p:sp>
-        <p:nvSpPr>
-          <p:cNvPr id="15" name="Rounded Rectangle 6"/>
-          <p:cNvSpPr/>
-          <p:nvPr/>
-        </p:nvSpPr>
-        <p:spPr>
-          <a:xfrm>
-            <a:off x="3524399" y="3581999"/>
-            <a:ext cx="2854800" cy="1188000"/>
-          </a:xfrm>
-          <a:prstGeom prst="roundRect">
-            <a:avLst>
-              <a:gd name="adj" fmla="val 10000"/>
-            </a:avLst>
-          </a:prstGeom>
-          <a:solidFill>
-            <a:srgbClr val="F4F7FF"/>
-          </a:solidFill>
-          <a:ln w="12700">
-            <a:solidFill>
-              <a:srgbClr val="D9D9D9"/>
-            </a:solidFill>
-          </a:ln>
-          <a:effectLst/>
-        </p:spPr>
-        <p:style>
-          <a:lnRef idx="1">
-            <a:schemeClr val="accent1"/>
-          </a:lnRef>
-          <a:fillRef idx="3">
-            <a:schemeClr val="accent1"/>
-          </a:fillRef>
-          <a:effectRef idx="2">
-            <a:schemeClr val="accent1"/>
-          </a:effectRef>
-          <a:fontRef idx="minor">
-            <a:schemeClr val="lt1"/>
-          </a:fontRef>
-        </p:style>
-        <p:txBody>
-          <a:bodyPr wrap="square" lIns="954000" tIns="18000" rIns="54000" bIns="18000" rtlCol="0" anchor="ctr"/>
-          <a:lstStyle/>
-          <a:p>
-            <a:pPr algn="ctr">
-              <a:lnSpc>
-                <a:spcPct val="120000"/>
-              </a:lnSpc>
-            </a:pPr>
-            <a:r>
-              <a:rPr sz="1000" b="0">
-                <a:solidFill>
-                  <a:srgbClr val="333333"/>
-                </a:solidFill>
-                <a:latin typeface="メイリオ"/>
-                <a:ea typeface="メイリオ"/>
-                <a:cs typeface="メイリオ"/>
-              </a:rPr>
-              <a:t>LINEからの問い合わせ</a:t>
-            </a:r>
-          </a:p>
-          <a:p>
-            <a:pPr algn="ctr">
-              <a:lnSpc>
-                <a:spcPct val="120000"/>
-              </a:lnSpc>
-            </a:pPr>
-            <a:r>
-              <a:rPr sz="1700" b="1">
-                <a:solidFill>
-                  <a:srgbClr val="1F285A"/>
-                </a:solidFill>
-                <a:latin typeface="メイリオ"/>
-                <a:ea typeface="メイリオ"/>
-                <a:cs typeface="メイリオ"/>
-              </a:rPr>
-              <a:t>面談予約率</a:t>
-            </a:r>
-          </a:p>
-          <a:p>
-            <a:pPr algn="ctr">
-              <a:lnSpc>
-                <a:spcPct val="120000"/>
-              </a:lnSpc>
-            </a:pPr>
-            <a:r>
-              <a:rPr sz="1700" b="1">
-                <a:solidFill>
-                  <a:srgbClr val="1F285A"/>
-                </a:solidFill>
-                <a:latin typeface="メイリオ"/>
-                <a:ea typeface="メイリオ"/>
-                <a:cs typeface="メイリオ"/>
-              </a:rPr>
-              <a:t>55%</a:t>
-            </a:r>
-          </a:p>
-        </p:txBody>
-      </p:sp>
-      <p:sp>
-        <p:nvSpPr>
-          <p:cNvPr id="16" name="Rounded Rectangle 4"/>
-          <p:cNvSpPr/>
-          <p:nvPr/>
-        </p:nvSpPr>
-        <p:spPr>
-          <a:xfrm>
-            <a:off x="6523200" y="3221999"/>
-            <a:ext cx="2854800" cy="324000"/>
-          </a:xfrm>
-          <a:prstGeom prst="roundRect">
-            <a:avLst>
-              <a:gd name="adj" fmla="val 10000"/>
-            </a:avLst>
-          </a:prstGeom>
-          <a:solidFill>
-            <a:srgbClr val="1F285A"/>
-          </a:solidFill>
-          <a:ln>
-            <a:noFill/>
-          </a:ln>
-          <a:effectLst/>
-        </p:spPr>
-        <p:style>
-          <a:lnRef idx="1">
-            <a:schemeClr val="accent1"/>
-          </a:lnRef>
-          <a:fillRef idx="3">
-            <a:schemeClr val="accent1"/>
-          </a:fillRef>
-          <a:effectRef idx="2">
-            <a:schemeClr val="accent1"/>
-          </a:effectRef>
-          <a:fontRef idx="minor">
-            <a:schemeClr val="lt1"/>
-          </a:fontRef>
-        </p:style>
-        <p:txBody>
-          <a:bodyPr wrap="square" lIns="54000" tIns="18000" rIns="54000" bIns="18000" rtlCol="0" anchor="ctr"/>
-          <a:lstStyle/>
-          <a:p>
-            <a:pPr algn="ctr">
-              <a:lnSpc>
-                <a:spcPct val="120000"/>
-              </a:lnSpc>
-            </a:pPr>
-            <a:r>
-              <a:rPr sz="1400" b="1">
-                <a:solidFill>
-                  <a:srgbClr val="FFFFFF"/>
-                </a:solidFill>
-                <a:latin typeface="メイリオ"/>
-                <a:ea typeface="メイリオ"/>
-                <a:cs typeface="メイリオ"/>
-              </a:rPr>
-              <a:t>サンマルクカフェ</a:t>
-            </a:r>
-          </a:p>
-        </p:txBody>
-      </p:sp>
-      <p:sp>
-        <p:nvSpPr>
-          <p:cNvPr id="17" name="Rounded Rectangle 6"/>
-          <p:cNvSpPr/>
-          <p:nvPr/>
-        </p:nvSpPr>
-        <p:spPr>
-          <a:xfrm>
-            <a:off x="6523200" y="3581999"/>
-            <a:ext cx="2854800" cy="1188000"/>
-          </a:xfrm>
-          <a:prstGeom prst="roundRect">
-            <a:avLst>
-              <a:gd name="adj" fmla="val 10000"/>
-            </a:avLst>
-          </a:prstGeom>
-          <a:solidFill>
-            <a:srgbClr val="F4F7FF"/>
-          </a:solidFill>
-          <a:ln w="12700">
-            <a:solidFill>
-              <a:srgbClr val="D9D9D9"/>
-            </a:solidFill>
-          </a:ln>
-          <a:effectLst/>
-        </p:spPr>
-        <p:style>
-          <a:lnRef idx="1">
-            <a:schemeClr val="accent1"/>
-          </a:lnRef>
-          <a:fillRef idx="3">
-            <a:schemeClr val="accent1"/>
-          </a:fillRef>
-          <a:effectRef idx="2">
-            <a:schemeClr val="accent1"/>
-          </a:effectRef>
-          <a:fontRef idx="minor">
-            <a:schemeClr val="lt1"/>
-          </a:fontRef>
-        </p:style>
-        <p:txBody>
-          <a:bodyPr wrap="square" lIns="954000" tIns="18000" rIns="54000" bIns="18000" rtlCol="0" anchor="ctr"/>
-          <a:lstStyle/>
-          <a:p>
-            <a:pPr algn="ctr">
-              <a:lnSpc>
-                <a:spcPct val="120000"/>
-              </a:lnSpc>
-            </a:pPr>
-            <a:r>
-              <a:rPr sz="1000" b="0">
-                <a:solidFill>
-                  <a:srgbClr val="333333"/>
-                </a:solidFill>
-                <a:latin typeface="メイリオ"/>
-                <a:ea typeface="メイリオ"/>
-                <a:cs typeface="メイリオ"/>
-              </a:rPr>
-              <a:t>メッセージを開封した方のうち</a:t>
-            </a:r>
-          </a:p>
-          <a:p>
-            <a:pPr algn="ctr">
-              <a:lnSpc>
-                <a:spcPct val="120000"/>
-              </a:lnSpc>
-            </a:pPr>
-            <a:r>
-              <a:rPr sz="1700" b="1">
-                <a:solidFill>
-                  <a:srgbClr val="1F285A"/>
-                </a:solidFill>
-                <a:latin typeface="メイリオ"/>
-                <a:ea typeface="メイリオ"/>
-                <a:cs typeface="メイリオ"/>
-              </a:rPr>
-              <a:t>当日に来店</a:t>
-            </a:r>
-          </a:p>
-          <a:p>
-            <a:pPr algn="ctr">
-              <a:lnSpc>
-                <a:spcPct val="120000"/>
-              </a:lnSpc>
-            </a:pPr>
-            <a:r>
-              <a:rPr sz="1700" b="1">
-                <a:solidFill>
-                  <a:srgbClr val="1F285A"/>
-                </a:solidFill>
-                <a:latin typeface="メイリオ"/>
-                <a:ea typeface="メイリオ"/>
-                <a:cs typeface="メイリオ"/>
-              </a:rPr>
-              <a:t>約40%</a:t>
-            </a:r>
-          </a:p>
-        </p:txBody>
-      </p:sp>
-      <p:sp>
-        <p:nvSpPr>
-          <p:cNvPr id="18" name="Rounded Rectangle 4"/>
-          <p:cNvSpPr/>
-          <p:nvPr/>
-        </p:nvSpPr>
-        <p:spPr>
-          <a:xfrm>
-            <a:off x="525600" y="4860000"/>
-            <a:ext cx="1080000" cy="468000"/>
-          </a:xfrm>
-          <a:prstGeom prst="roundRect">
-            <a:avLst>
-              <a:gd name="adj" fmla="val 10000"/>
-            </a:avLst>
-          </a:prstGeom>
-          <a:solidFill>
-            <a:srgbClr val="1F285A"/>
-          </a:solidFill>
-          <a:ln>
-            <a:noFill/>
-          </a:ln>
-          <a:effectLst/>
-        </p:spPr>
-        <p:style>
-          <a:lnRef idx="1">
-            <a:schemeClr val="accent1"/>
-          </a:lnRef>
-          <a:fillRef idx="3">
-            <a:schemeClr val="accent1"/>
-          </a:fillRef>
-          <a:effectRef idx="2">
-            <a:schemeClr val="accent1"/>
-          </a:effectRef>
-          <a:fontRef idx="minor">
-            <a:schemeClr val="lt1"/>
-          </a:fontRef>
-        </p:style>
-        <p:txBody>
-          <a:bodyPr wrap="square" lIns="54000" tIns="18000" rIns="54000" bIns="18000" rtlCol="0" anchor="ctr"/>
-          <a:lstStyle/>
-          <a:p>
-            <a:pPr algn="ctr">
-              <a:lnSpc>
-                <a:spcPct val="120000"/>
-              </a:lnSpc>
-            </a:pPr>
-            <a:r>
-              <a:rPr sz="1600" b="1">
-                <a:solidFill>
-                  <a:srgbClr val="FFFFFF"/>
-                </a:solidFill>
-                <a:latin typeface="メイリオ"/>
-                <a:ea typeface="メイリオ"/>
-                <a:cs typeface="メイリオ"/>
-              </a:rPr>
-              <a:t>費用</a:t>
-            </a:r>
-          </a:p>
-        </p:txBody>
-      </p:sp>
-      <p:sp>
-        <p:nvSpPr>
-          <p:cNvPr id="19" name="Rounded Rectangle 8"/>
-          <p:cNvSpPr/>
-          <p:nvPr/>
-        </p:nvSpPr>
-        <p:spPr>
-          <a:xfrm>
-            <a:off x="1677600" y="4860000"/>
-            <a:ext cx="1944000" cy="468000"/>
-          </a:xfrm>
-          <a:prstGeom prst="roundRect">
-            <a:avLst>
-              <a:gd name="adj" fmla="val 10000"/>
-            </a:avLst>
-          </a:prstGeom>
-          <a:solidFill>
-            <a:srgbClr val="06C755"/>
-          </a:solidFill>
-          <a:ln>
-            <a:noFill/>
-          </a:ln>
-          <a:effectLst/>
-        </p:spPr>
-        <p:style>
-          <a:lnRef idx="1">
-            <a:schemeClr val="accent1"/>
-          </a:lnRef>
-          <a:fillRef idx="3">
-            <a:schemeClr val="accent1"/>
-          </a:fillRef>
-          <a:effectRef idx="2">
-            <a:schemeClr val="accent1"/>
-          </a:effectRef>
-          <a:fontRef idx="minor">
-            <a:schemeClr val="lt1"/>
-          </a:fontRef>
-        </p:style>
-        <p:txBody>
-          <a:bodyPr wrap="square" lIns="54000" tIns="18000" rIns="54000" bIns="18000" rtlCol="0" anchor="ctr"/>
-          <a:lstStyle/>
-          <a:p>
-            <a:pPr algn="ctr">
-              <a:lnSpc>
-                <a:spcPct val="120000"/>
-              </a:lnSpc>
-            </a:pPr>
-            <a:r>
-              <a:rPr sz="1800" b="1">
-                <a:solidFill>
-                  <a:srgbClr val="FFFFFF"/>
-                </a:solidFill>
-                <a:latin typeface="メイリオ"/>
-                <a:ea typeface="メイリオ"/>
-                <a:cs typeface="メイリオ"/>
-              </a:rPr>
-              <a:t>初期 15万円</a:t>
-            </a:r>
-          </a:p>
-        </p:txBody>
-      </p:sp>
-      <p:sp>
-        <p:nvSpPr>
-          <p:cNvPr id="20" name="Rounded Rectangle 8"/>
-          <p:cNvSpPr/>
-          <p:nvPr/>
-        </p:nvSpPr>
-        <p:spPr>
-          <a:xfrm>
-            <a:off x="3693600" y="4860000"/>
-            <a:ext cx="1944000" cy="468000"/>
-          </a:xfrm>
-          <a:prstGeom prst="roundRect">
-            <a:avLst>
-              <a:gd name="adj" fmla="val 10000"/>
-            </a:avLst>
-          </a:prstGeom>
-          <a:solidFill>
-            <a:srgbClr val="06C755"/>
-          </a:solidFill>
-          <a:ln>
-            <a:noFill/>
-          </a:ln>
-          <a:effectLst/>
-        </p:spPr>
-        <p:style>
-          <a:lnRef idx="1">
-            <a:schemeClr val="accent1"/>
-          </a:lnRef>
-          <a:fillRef idx="3">
-            <a:schemeClr val="accent1"/>
-          </a:fillRef>
-          <a:effectRef idx="2">
-            <a:schemeClr val="accent1"/>
-          </a:effectRef>
-          <a:fontRef idx="minor">
-            <a:schemeClr val="lt1"/>
-          </a:fontRef>
-        </p:style>
-        <p:txBody>
-          <a:bodyPr wrap="square" lIns="54000" tIns="18000" rIns="54000" bIns="18000" rtlCol="0" anchor="ctr"/>
-          <a:lstStyle/>
-          <a:p>
-            <a:pPr algn="ctr">
-              <a:lnSpc>
-                <a:spcPct val="120000"/>
-              </a:lnSpc>
-            </a:pPr>
-            <a:r>
-              <a:rPr sz="1800" b="1">
-                <a:solidFill>
-                  <a:srgbClr val="FFFFFF"/>
-                </a:solidFill>
-                <a:latin typeface="メイリオ"/>
-                <a:ea typeface="メイリオ"/>
-                <a:cs typeface="メイリオ"/>
-              </a:rPr>
-              <a:t>月額 3万円〜</a:t>
-            </a:r>
-          </a:p>
-        </p:txBody>
-      </p:sp>
-      <p:sp>
-        <p:nvSpPr>
-          <p:cNvPr id="21" name="TextBox 10"/>
-          <p:cNvSpPr txBox="1"/>
-          <p:nvPr/>
-        </p:nvSpPr>
-        <p:spPr>
-          <a:xfrm>
-            <a:off x="5709600" y="4860000"/>
-            <a:ext cx="3668400" cy="468000"/>
-          </a:xfrm>
-          <a:prstGeom prst="rect">
-            <a:avLst/>
-          </a:prstGeom>
-          <a:noFill/>
-        </p:spPr>
-        <p:txBody>
-          <a:bodyPr wrap="square" lIns="0" tIns="21600" rIns="50400" bIns="21600" anchor="ctr">
-            <a:spAutoFit/>
-          </a:bodyPr>
-          <a:lstStyle/>
-          <a:p>
-            <a:pPr algn="ctr"/>
-            <a:r>
-              <a:rPr sz="1100" b="0">
-                <a:solidFill>
-                  <a:srgbClr val="7F7F7F"/>
-                </a:solidFill>
-                <a:latin typeface="メイリオ"/>
-                <a:ea typeface="メイリオ"/>
-                <a:cs typeface="メイリオ"/>
-              </a:rPr>
-              <a:t>※APIツール（Lステップ等）と併用可</a:t>
-            </a:r>
-          </a:p>
-          <a:p>
-            <a:pPr algn="ctr"/>
-            <a:r>
-              <a:rPr sz="1100" b="0">
-                <a:solidFill>
-                  <a:srgbClr val="7F7F7F"/>
-                </a:solidFill>
-                <a:latin typeface="メイリオ"/>
-                <a:ea typeface="メイリオ"/>
-                <a:cs typeface="メイリオ"/>
-              </a:rPr>
-              <a:t>※完了画面を増やす場合は追加費用</a:t>
-            </a:r>
-          </a:p>
-        </p:txBody>
-      </p:sp>
-      <p:sp>
-        <p:nvSpPr>
           <p:cNvPr id="22" name="Rounded Rectangle 4"/>
           <p:cNvSpPr/>
           <p:nvPr/>
         </p:nvSpPr>
         <p:spPr>
           <a:xfrm>
-            <a:off x="525600" y="5400000"/>
-            <a:ext cx="8852400" cy="468000"/>
+            <a:off x="525600" y="5636153"/>
+            <a:ext cx="8852400" cy="432000"/>
           </a:xfrm>
           <a:prstGeom prst="roundRect">
             <a:avLst>
@@ -5000,7 +3806,7 @@
         </p:nvSpPr>
         <p:spPr>
           <a:xfrm>
-            <a:off x="525600" y="5903999"/>
+            <a:off x="525600" y="6086153"/>
             <a:ext cx="8852400" cy="288000"/>
           </a:xfrm>
           <a:prstGeom prst="rect">
@@ -5035,7 +3841,7 @@
       </p:sp>
       <p:pic>
         <p:nvPicPr>
-          <p:cNvPr id="24" name="Picture 23" descr="thanks_icon_beauty.png"/>
+          <p:cNvPr id="24" name="実績と費用" descr="thanks_line_jisseki.png"/>
           <p:cNvPicPr>
             <a:picLocks noChangeAspect="1"/>
           </p:cNvPicPr>
@@ -5049,128 +3855,8 @@
         </p:blipFill>
         <p:spPr>
           <a:xfrm>
-            <a:off x="615600" y="2178000"/>
-            <a:ext cx="827999" cy="827999"/>
-          </a:xfrm>
-          <a:prstGeom prst="rect">
-            <a:avLst/>
-          </a:prstGeom>
-        </p:spPr>
-      </p:pic>
-      <p:pic>
-        <p:nvPicPr>
-          <p:cNvPr id="25" name="Picture 24" descr="thanks_icon_hoken.png"/>
-          <p:cNvPicPr>
-            <a:picLocks noChangeAspect="1"/>
-          </p:cNvPicPr>
-          <p:nvPr/>
-        </p:nvPicPr>
-        <p:blipFill>
-          <a:blip r:embed="rId3"/>
-          <a:stretch>
-            <a:fillRect/>
-          </a:stretch>
-        </p:blipFill>
-        <p:spPr>
-          <a:xfrm>
-            <a:off x="3614399" y="2178000"/>
-            <a:ext cx="827999" cy="827999"/>
-          </a:xfrm>
-          <a:prstGeom prst="rect">
-            <a:avLst/>
-          </a:prstGeom>
-        </p:spPr>
-      </p:pic>
-      <p:pic>
-        <p:nvPicPr>
-          <p:cNvPr id="26" name="Picture 25" descr="thanks_icon_bus.png"/>
-          <p:cNvPicPr>
-            <a:picLocks noChangeAspect="1"/>
-          </p:cNvPicPr>
-          <p:nvPr/>
-        </p:nvPicPr>
-        <p:blipFill>
-          <a:blip r:embed="rId4"/>
-          <a:stretch>
-            <a:fillRect/>
-          </a:stretch>
-        </p:blipFill>
-        <p:spPr>
-          <a:xfrm>
-            <a:off x="6613200" y="2178000"/>
-            <a:ext cx="827999" cy="827999"/>
-          </a:xfrm>
-          <a:prstGeom prst="rect">
-            <a:avLst/>
-          </a:prstGeom>
-        </p:spPr>
-      </p:pic>
-      <p:pic>
-        <p:nvPicPr>
-          <p:cNvPr id="27" name="Picture 26" descr="thanks_icon_hifuka.png"/>
-          <p:cNvPicPr>
-            <a:picLocks noChangeAspect="1"/>
-          </p:cNvPicPr>
-          <p:nvPr/>
-        </p:nvPicPr>
-        <p:blipFill>
-          <a:blip r:embed="rId5"/>
-          <a:stretch>
-            <a:fillRect/>
-          </a:stretch>
-        </p:blipFill>
-        <p:spPr>
-          <a:xfrm>
-            <a:off x="615600" y="3761999"/>
-            <a:ext cx="827999" cy="827999"/>
-          </a:xfrm>
-          <a:prstGeom prst="rect">
-            <a:avLst/>
-          </a:prstGeom>
-        </p:spPr>
-      </p:pic>
-      <p:pic>
-        <p:nvPicPr>
-          <p:cNvPr id="28" name="Picture 27" descr="thanks_icon_shushoku.png"/>
-          <p:cNvPicPr>
-            <a:picLocks noChangeAspect="1"/>
-          </p:cNvPicPr>
-          <p:nvPr/>
-        </p:nvPicPr>
-        <p:blipFill>
-          <a:blip r:embed="rId6"/>
-          <a:stretch>
-            <a:fillRect/>
-          </a:stretch>
-        </p:blipFill>
-        <p:spPr>
-          <a:xfrm>
-            <a:off x="3614399" y="3761999"/>
-            <a:ext cx="827999" cy="827999"/>
-          </a:xfrm>
-          <a:prstGeom prst="rect">
-            <a:avLst/>
-          </a:prstGeom>
-        </p:spPr>
-      </p:pic>
-      <p:pic>
-        <p:nvPicPr>
-          <p:cNvPr id="29" name="Picture 28" descr="thanks_icon_cafe.png"/>
-          <p:cNvPicPr>
-            <a:picLocks noChangeAspect="1"/>
-          </p:cNvPicPr>
-          <p:nvPr/>
-        </p:nvPicPr>
-        <p:blipFill>
-          <a:blip r:embed="rId7"/>
-          <a:stretch>
-            <a:fillRect/>
-          </a:stretch>
-        </p:blipFill>
-        <p:spPr>
-          <a:xfrm>
-            <a:off x="6613200" y="3761999"/>
-            <a:ext cx="827999" cy="827999"/>
+            <a:off x="1352999" y="1494000"/>
+            <a:ext cx="7200000" cy="4052153"/>
           </a:xfrm>
           <a:prstGeom prst="rect">
             <a:avLst/>

--- a/20261001_サンクスLINEのご提案.pptx
+++ b/20261001_サンクスLINEのご提案.pptx
@@ -3745,7 +3745,7 @@
         </p:nvSpPr>
         <p:spPr>
           <a:xfrm>
-            <a:off x="525600" y="5636153"/>
+            <a:off x="525600" y="5226330"/>
             <a:ext cx="8852400" cy="432000"/>
           </a:xfrm>
           <a:prstGeom prst="roundRect">
@@ -3806,7 +3806,7 @@
         </p:nvSpPr>
         <p:spPr>
           <a:xfrm>
-            <a:off x="525600" y="6086153"/>
+            <a:off x="525600" y="5694330"/>
             <a:ext cx="8852400" cy="288000"/>
           </a:xfrm>
           <a:prstGeom prst="rect">
@@ -3855,8 +3855,8 @@
         </p:blipFill>
         <p:spPr>
           <a:xfrm>
-            <a:off x="1352999" y="1494000"/>
-            <a:ext cx="7200000" cy="4052153"/>
+            <a:off x="1892999" y="1620000"/>
+            <a:ext cx="6120000" cy="3444330"/>
           </a:xfrm>
           <a:prstGeom prst="rect">
             <a:avLst/>

--- a/20261001_サンクスLINEのご提案.pptx
+++ b/20261001_サンクスLINEのご提案.pptx
@@ -3477,7 +3477,7 @@
                 <a:ea typeface="メイリオ"/>
                 <a:cs typeface="メイリオ"/>
               </a:rPr>
-              <a:t>友だち集めの広告費ゼロ</a:t>
+              <a:t>今の広告の申込みを活用</a:t>
             </a:r>
             <a:endParaRPr sz="1250" b="1" dirty="0">
               <a:solidFill>
@@ -3549,7 +3549,7 @@
                 <a:ea typeface="メイリオ"/>
                 <a:cs typeface="メイリオ"/>
               </a:rPr>
-              <a:t>入力内容をそのまま活用</a:t>
+              <a:t>前日のお知らせで来院へ</a:t>
             </a:r>
             <a:endParaRPr sz="1250" b="1" dirty="0">
               <a:solidFill>

--- a/20261001_サンクスLINEのご提案.pptx
+++ b/20261001_サンクスLINEのご提案.pptx
@@ -3385,7 +3385,7 @@
           </a:fontRef>
         </p:style>
         <p:txBody>
-          <a:bodyPr wrap="square" lIns="125999" tIns="90000" rIns="108000" bIns="54000" rtlCol="0" anchor="ctr"/>
+          <a:bodyPr wrap="square" lIns="36000" tIns="90000" rIns="36000" bIns="54000" rtlCol="0" anchor="ctr"/>
           <a:lstStyle/>
           <a:p>
             <a:pPr algn="ctr">
@@ -3397,7 +3397,7 @@
               </a:spcAft>
             </a:pPr>
             <a:r>
-              <a:rPr sz="1500" b="1" dirty="0" err="1">
+              <a:rPr sz="1400" b="1" dirty="0" err="1">
                 <a:solidFill>
                   <a:srgbClr val="1F285A"/>
                 </a:solidFill>
@@ -3405,7 +3405,7 @@
                 <a:ea typeface="メイリオ"/>
                 <a:cs typeface="メイリオ"/>
               </a:rPr>
-              <a:t>関心が一番高い直後に案内</a:t>
+              <a:t>申込み直後が、いちばん響く</a:t>
             </a:r>
             <a:endParaRPr sz="1250" b="1" dirty="0">
               <a:solidFill>
@@ -3457,7 +3457,7 @@
           </a:fontRef>
         </p:style>
         <p:txBody>
-          <a:bodyPr wrap="square" lIns="125999" tIns="90000" rIns="108000" bIns="54000" rtlCol="0" anchor="ctr"/>
+          <a:bodyPr wrap="square" lIns="36000" tIns="90000" rIns="36000" bIns="54000" rtlCol="0" anchor="ctr"/>
           <a:lstStyle/>
           <a:p>
             <a:pPr algn="ctr">
@@ -3469,7 +3469,7 @@
               </a:spcAft>
             </a:pPr>
             <a:r>
-              <a:rPr sz="1500" b="1" dirty="0" err="1">
+              <a:rPr sz="1400" b="1" dirty="0" err="1">
                 <a:solidFill>
                   <a:srgbClr val="1F285A"/>
                 </a:solidFill>
@@ -3477,7 +3477,7 @@
                 <a:ea typeface="メイリオ"/>
                 <a:cs typeface="メイリオ"/>
               </a:rPr>
-              <a:t>今の広告の申込みを活用</a:t>
+              <a:t>広告の申込みを、逃さない</a:t>
             </a:r>
             <a:endParaRPr sz="1250" b="1" dirty="0">
               <a:solidFill>
@@ -3529,7 +3529,7 @@
           </a:fontRef>
         </p:style>
         <p:txBody>
-          <a:bodyPr wrap="square" lIns="125999" tIns="90000" rIns="108000" bIns="54000" rtlCol="0" anchor="ctr"/>
+          <a:bodyPr wrap="square" lIns="36000" tIns="90000" rIns="36000" bIns="54000" rtlCol="0" anchor="ctr"/>
           <a:lstStyle/>
           <a:p>
             <a:pPr algn="ctr">
@@ -3541,7 +3541,7 @@
               </a:spcAft>
             </a:pPr>
             <a:r>
-              <a:rPr sz="1500" b="1" dirty="0" err="1">
+              <a:rPr sz="1400" b="1" dirty="0" err="1">
                 <a:solidFill>
                   <a:srgbClr val="1F285A"/>
                 </a:solidFill>
@@ -3549,7 +3549,7 @@
                 <a:ea typeface="メイリオ"/>
                 <a:cs typeface="メイリオ"/>
               </a:rPr>
-              <a:t>前日のお知らせで来院へ</a:t>
+              <a:t>無断キャンセルを、前日に防ぐ</a:t>
             </a:r>
             <a:endParaRPr sz="1250" b="1" dirty="0">
               <a:solidFill>
